--- a/Age-weight.pptx
+++ b/Age-weight.pptx
@@ -11,6 +11,8 @@
     <p:sldId id="259" r:id="rId5"/>
     <p:sldId id="260" r:id="rId6"/>
     <p:sldId id="261" r:id="rId7"/>
+    <p:sldId id="262" r:id="rId8"/>
+    <p:sldId id="263" r:id="rId9"/>
   </p:sldIdLst>
   <p:sldSz cx="12192000" cy="6858000"/>
   <p:notesSz cx="6858000" cy="9144000"/>
@@ -275,7 +277,7 @@
           <a:p>
             <a:fld id="{F4237474-823B-48E8-A178-386E6D02D7F9}" type="datetime2">
               <a:rPr lang="en-US" smtClean="0"/>
-              <a:t>Saturday, March 14, 2026</a:t>
+              <a:t>Sunday, March 15, 2026</a:t>
             </a:fld>
             <a:endParaRPr lang="en-US"/>
           </a:p>
@@ -473,7 +475,7 @@
           <a:p>
             <a:fld id="{BC34246E-588A-4761-B86F-31A92ABCD4D5}" type="datetime2">
               <a:rPr lang="en-US" smtClean="0"/>
-              <a:t>Saturday, March 14, 2026</a:t>
+              <a:t>Sunday, March 15, 2026</a:t>
             </a:fld>
             <a:endParaRPr lang="en-US"/>
           </a:p>
@@ -683,7 +685,7 @@
           <a:p>
             <a:fld id="{4C3E9734-38C9-4A1D-A001-D47FFEDBBFBF}" type="datetime2">
               <a:rPr lang="en-US" smtClean="0"/>
-              <a:t>Saturday, March 14, 2026</a:t>
+              <a:t>Sunday, March 15, 2026</a:t>
             </a:fld>
             <a:endParaRPr lang="en-US"/>
           </a:p>
@@ -895,7 +897,7 @@
           <a:p>
             <a:fld id="{A6D14B8F-CE2D-424D-AF0A-C48024A68703}" type="datetime2">
               <a:rPr lang="en-US" smtClean="0"/>
-              <a:t>Saturday, March 14, 2026</a:t>
+              <a:t>Sunday, March 15, 2026</a:t>
             </a:fld>
             <a:endParaRPr lang="en-US" cap="all" dirty="0"/>
           </a:p>
@@ -1178,7 +1180,7 @@
           <a:p>
             <a:fld id="{03A95F7C-483B-45C6-BFC8-E460EFA96477}" type="datetime2">
               <a:rPr lang="en-US" smtClean="0"/>
-              <a:t>Saturday, March 14, 2026</a:t>
+              <a:t>Sunday, March 15, 2026</a:t>
             </a:fld>
             <a:endParaRPr lang="en-US"/>
           </a:p>
@@ -1284,7 +1286,12 @@
             <p:ph type="title"/>
           </p:nvPr>
         </p:nvSpPr>
-        <p:spPr/>
+        <p:spPr>
+          <a:xfrm>
+            <a:off x="1371600" y="46380"/>
+            <a:ext cx="10241280" cy="1234440"/>
+          </a:xfrm>
+        </p:spPr>
         <p:txBody>
           <a:bodyPr/>
           <a:lstStyle/>
@@ -1315,8 +1322,8 @@
         </p:nvSpPr>
         <p:spPr>
           <a:xfrm>
-            <a:off x="1371600" y="2112264"/>
-            <a:ext cx="4846320" cy="3959352"/>
+            <a:off x="826265" y="1388125"/>
+            <a:ext cx="5739788" cy="4683491"/>
           </a:xfrm>
         </p:spPr>
         <p:txBody>
@@ -1325,38 +1332,37 @@
           <a:p>
             <a:pPr lvl="0"/>
             <a:r>
-              <a:rPr lang="en-US"/>
+              <a:rPr lang="en-US" dirty="0"/>
               <a:t>Click to edit Master text styles</a:t>
             </a:r>
           </a:p>
           <a:p>
             <a:pPr lvl="1"/>
             <a:r>
-              <a:rPr lang="en-US"/>
+              <a:rPr lang="en-US" dirty="0"/>
               <a:t>Second level</a:t>
             </a:r>
           </a:p>
           <a:p>
             <a:pPr lvl="2"/>
             <a:r>
-              <a:rPr lang="en-US"/>
+              <a:rPr lang="en-US" dirty="0"/>
               <a:t>Third level</a:t>
             </a:r>
           </a:p>
           <a:p>
             <a:pPr lvl="3"/>
             <a:r>
-              <a:rPr lang="en-US"/>
+              <a:rPr lang="en-US" dirty="0"/>
               <a:t>Fourth level</a:t>
             </a:r>
           </a:p>
           <a:p>
             <a:pPr lvl="4"/>
             <a:r>
-              <a:rPr lang="en-US"/>
+              <a:rPr lang="en-US" dirty="0"/>
               <a:t>Fifth level</a:t>
             </a:r>
-            <a:endParaRPr lang="en-US" dirty="0"/>
           </a:p>
         </p:txBody>
       </p:sp>
@@ -1378,8 +1384,8 @@
         </p:nvSpPr>
         <p:spPr>
           <a:xfrm>
-            <a:off x="6766560" y="2112265"/>
-            <a:ext cx="4846320" cy="3959351"/>
+            <a:off x="6766560" y="1388125"/>
+            <a:ext cx="5175724" cy="4913523"/>
           </a:xfrm>
         </p:spPr>
         <p:txBody>
@@ -1388,38 +1394,37 @@
           <a:p>
             <a:pPr lvl="0"/>
             <a:r>
-              <a:rPr lang="en-US"/>
+              <a:rPr lang="en-US" dirty="0"/>
               <a:t>Click to edit Master text styles</a:t>
             </a:r>
           </a:p>
           <a:p>
             <a:pPr lvl="1"/>
             <a:r>
-              <a:rPr lang="en-US"/>
+              <a:rPr lang="en-US" dirty="0"/>
               <a:t>Second level</a:t>
             </a:r>
           </a:p>
           <a:p>
             <a:pPr lvl="2"/>
             <a:r>
-              <a:rPr lang="en-US"/>
+              <a:rPr lang="en-US" dirty="0"/>
               <a:t>Third level</a:t>
             </a:r>
           </a:p>
           <a:p>
             <a:pPr lvl="3"/>
             <a:r>
-              <a:rPr lang="en-US"/>
+              <a:rPr lang="en-US" dirty="0"/>
               <a:t>Fourth level</a:t>
             </a:r>
           </a:p>
           <a:p>
             <a:pPr lvl="4"/>
             <a:r>
-              <a:rPr lang="en-US"/>
+              <a:rPr lang="en-US" dirty="0"/>
               <a:t>Fifth level</a:t>
             </a:r>
-            <a:endParaRPr lang="en-US" dirty="0"/>
           </a:p>
         </p:txBody>
       </p:sp>
@@ -1446,7 +1451,7 @@
           <a:p>
             <a:fld id="{97AFCF0B-5C8B-4F90-8DBC-1FCCD310983A}" type="datetime2">
               <a:rPr lang="en-US" smtClean="0"/>
-              <a:t>Saturday, March 14, 2026</a:t>
+              <a:t>Sunday, March 15, 2026</a:t>
             </a:fld>
             <a:endParaRPr lang="en-US"/>
           </a:p>
@@ -1520,7 +1525,7 @@
 </file>
 
 <file path=ppt/slideLayouts/slideLayout5.xml><?xml version="1.0" encoding="utf-8"?>
-<p:sldLayout xmlns:a="http://schemas.openxmlformats.org/drawingml/2006/main" xmlns:r="http://schemas.openxmlformats.org/officeDocument/2006/relationships" xmlns:p="http://schemas.openxmlformats.org/presentationml/2006/main" preserve="1">
+<p:sldLayout xmlns:a="http://schemas.openxmlformats.org/drawingml/2006/main" xmlns:r="http://schemas.openxmlformats.org/officeDocument/2006/relationships" xmlns:p="http://schemas.openxmlformats.org/presentationml/2006/main" preserve="1" userDrawn="1">
   <p:cSld name="Comparison">
     <p:spTree>
       <p:nvGrpSpPr>
@@ -1538,95 +1543,55 @@
       </p:grpSpPr>
       <p:sp>
         <p:nvSpPr>
-          <p:cNvPr id="3" name="Text Placeholder 2">
-            <a:extLst>
-              <a:ext uri="{FF2B5EF4-FFF2-40B4-BE49-F238E27FC236}">
-                <a16:creationId xmlns:a16="http://schemas.microsoft.com/office/drawing/2014/main" id="{82036E0D-26A5-455A-A8BD-70DA8BC03EB2}"/>
-              </a:ext>
-            </a:extLst>
-          </p:cNvPr>
-          <p:cNvSpPr>
-            <a:spLocks noGrp="1"/>
-          </p:cNvSpPr>
-          <p:nvPr>
-            <p:ph type="body" idx="1"/>
+          <p:cNvPr id="4" name="Content Placeholder 3">
+            <a:extLst>
+              <a:ext uri="{FF2B5EF4-FFF2-40B4-BE49-F238E27FC236}">
+                <a16:creationId xmlns:a16="http://schemas.microsoft.com/office/drawing/2014/main" id="{E7FD4EA0-094D-4056-9032-BFB44B40896B}"/>
+              </a:ext>
+            </a:extLst>
+          </p:cNvPr>
+          <p:cNvSpPr>
+            <a:spLocks noGrp="1"/>
+          </p:cNvSpPr>
+          <p:nvPr>
+            <p:ph sz="half" idx="2"/>
           </p:nvPr>
         </p:nvSpPr>
         <p:spPr>
           <a:xfrm>
-            <a:off x="1371600" y="2112264"/>
-            <a:ext cx="4841076" cy="823912"/>
+            <a:off x="711005" y="3757200"/>
+            <a:ext cx="4841076" cy="2539382"/>
           </a:xfrm>
         </p:spPr>
         <p:txBody>
-          <a:bodyPr anchor="b"/>
-          <a:lstStyle>
-            <a:lvl1pPr marL="0" indent="0">
-              <a:buNone/>
-              <a:defRPr sz="2400" b="1"/>
-            </a:lvl1pPr>
-            <a:lvl2pPr marL="457200" indent="0">
-              <a:buNone/>
-              <a:defRPr sz="2000" b="1"/>
-            </a:lvl2pPr>
-            <a:lvl3pPr marL="914400" indent="0">
-              <a:buNone/>
-              <a:defRPr sz="1800" b="1"/>
-            </a:lvl3pPr>
-            <a:lvl4pPr marL="1371600" indent="0">
-              <a:buNone/>
-              <a:defRPr sz="1600" b="1"/>
-            </a:lvl4pPr>
-            <a:lvl5pPr marL="1828800" indent="0">
-              <a:buNone/>
-              <a:defRPr sz="1600" b="1"/>
-            </a:lvl5pPr>
-            <a:lvl6pPr marL="2286000" indent="0">
-              <a:buNone/>
-              <a:defRPr sz="1600" b="1"/>
-            </a:lvl6pPr>
-            <a:lvl7pPr marL="2743200" indent="0">
-              <a:buNone/>
-              <a:defRPr sz="1600" b="1"/>
-            </a:lvl7pPr>
-            <a:lvl8pPr marL="3200400" indent="0">
-              <a:buNone/>
-              <a:defRPr sz="1600" b="1"/>
-            </a:lvl8pPr>
-            <a:lvl9pPr marL="3657600" indent="0">
-              <a:buNone/>
-              <a:defRPr sz="1600" b="1"/>
-            </a:lvl9pPr>
-          </a:lstStyle>
+          <a:bodyPr/>
+          <a:lstStyle/>
           <a:p>
             <a:pPr lvl="0"/>
-            <a:r>
-              <a:rPr lang="en-US"/>
-              <a:t>Click to edit Master text styles</a:t>
-            </a:r>
-          </a:p>
-        </p:txBody>
-      </p:sp>
-      <p:sp>
-        <p:nvSpPr>
-          <p:cNvPr id="4" name="Content Placeholder 3">
-            <a:extLst>
-              <a:ext uri="{FF2B5EF4-FFF2-40B4-BE49-F238E27FC236}">
-                <a16:creationId xmlns:a16="http://schemas.microsoft.com/office/drawing/2014/main" id="{E7FD4EA0-094D-4056-9032-BFB44B40896B}"/>
-              </a:ext>
-            </a:extLst>
-          </p:cNvPr>
-          <p:cNvSpPr>
-            <a:spLocks noGrp="1"/>
-          </p:cNvSpPr>
-          <p:nvPr>
-            <p:ph sz="half" idx="2"/>
+            <a:endParaRPr lang="en-US" dirty="0"/>
+          </a:p>
+        </p:txBody>
+      </p:sp>
+      <p:sp>
+        <p:nvSpPr>
+          <p:cNvPr id="6" name="Content Placeholder 5">
+            <a:extLst>
+              <a:ext uri="{FF2B5EF4-FFF2-40B4-BE49-F238E27FC236}">
+                <a16:creationId xmlns:a16="http://schemas.microsoft.com/office/drawing/2014/main" id="{56CE86DF-0069-4D31-BDD3-A9A2F9B7B468}"/>
+              </a:ext>
+            </a:extLst>
+          </p:cNvPr>
+          <p:cNvSpPr>
+            <a:spLocks noGrp="1"/>
+          </p:cNvSpPr>
+          <p:nvPr>
+            <p:ph sz="quarter" idx="4"/>
           </p:nvPr>
         </p:nvSpPr>
         <p:spPr>
           <a:xfrm>
-            <a:off x="1371600" y="3018472"/>
-            <a:ext cx="4841076" cy="3104856"/>
+            <a:off x="6818024" y="3757199"/>
+            <a:ext cx="4841076" cy="2539383"/>
           </a:xfrm>
         </p:spPr>
         <p:txBody>
@@ -1634,172 +1599,6 @@
           <a:lstStyle/>
           <a:p>
             <a:pPr lvl="0"/>
-            <a:r>
-              <a:rPr lang="en-US"/>
-              <a:t>Click to edit Master text styles</a:t>
-            </a:r>
-          </a:p>
-          <a:p>
-            <a:pPr lvl="1"/>
-            <a:r>
-              <a:rPr lang="en-US"/>
-              <a:t>Second level</a:t>
-            </a:r>
-          </a:p>
-          <a:p>
-            <a:pPr lvl="2"/>
-            <a:r>
-              <a:rPr lang="en-US"/>
-              <a:t>Third level</a:t>
-            </a:r>
-          </a:p>
-          <a:p>
-            <a:pPr lvl="3"/>
-            <a:r>
-              <a:rPr lang="en-US"/>
-              <a:t>Fourth level</a:t>
-            </a:r>
-          </a:p>
-          <a:p>
-            <a:pPr lvl="4"/>
-            <a:r>
-              <a:rPr lang="en-US"/>
-              <a:t>Fifth level</a:t>
-            </a:r>
-            <a:endParaRPr lang="en-US" dirty="0"/>
-          </a:p>
-        </p:txBody>
-      </p:sp>
-      <p:sp>
-        <p:nvSpPr>
-          <p:cNvPr id="5" name="Text Placeholder 4">
-            <a:extLst>
-              <a:ext uri="{FF2B5EF4-FFF2-40B4-BE49-F238E27FC236}">
-                <a16:creationId xmlns:a16="http://schemas.microsoft.com/office/drawing/2014/main" id="{5FC0CCE8-718F-4620-8B4A-C60EEA7B884D}"/>
-              </a:ext>
-            </a:extLst>
-          </p:cNvPr>
-          <p:cNvSpPr>
-            <a:spLocks noGrp="1"/>
-          </p:cNvSpPr>
-          <p:nvPr>
-            <p:ph type="body" sz="quarter" idx="3"/>
-          </p:nvPr>
-        </p:nvSpPr>
-        <p:spPr>
-          <a:xfrm>
-            <a:off x="6766560" y="2112264"/>
-            <a:ext cx="4846320" cy="823912"/>
-          </a:xfrm>
-        </p:spPr>
-        <p:txBody>
-          <a:bodyPr anchor="b"/>
-          <a:lstStyle>
-            <a:lvl1pPr marL="0" indent="0">
-              <a:buNone/>
-              <a:defRPr sz="2400" b="1"/>
-            </a:lvl1pPr>
-            <a:lvl2pPr marL="457200" indent="0">
-              <a:buNone/>
-              <a:defRPr sz="2000" b="1"/>
-            </a:lvl2pPr>
-            <a:lvl3pPr marL="914400" indent="0">
-              <a:buNone/>
-              <a:defRPr sz="1800" b="1"/>
-            </a:lvl3pPr>
-            <a:lvl4pPr marL="1371600" indent="0">
-              <a:buNone/>
-              <a:defRPr sz="1600" b="1"/>
-            </a:lvl4pPr>
-            <a:lvl5pPr marL="1828800" indent="0">
-              <a:buNone/>
-              <a:defRPr sz="1600" b="1"/>
-            </a:lvl5pPr>
-            <a:lvl6pPr marL="2286000" indent="0">
-              <a:buNone/>
-              <a:defRPr sz="1600" b="1"/>
-            </a:lvl6pPr>
-            <a:lvl7pPr marL="2743200" indent="0">
-              <a:buNone/>
-              <a:defRPr sz="1600" b="1"/>
-            </a:lvl7pPr>
-            <a:lvl8pPr marL="3200400" indent="0">
-              <a:buNone/>
-              <a:defRPr sz="1600" b="1"/>
-            </a:lvl8pPr>
-            <a:lvl9pPr marL="3657600" indent="0">
-              <a:buNone/>
-              <a:defRPr sz="1600" b="1"/>
-            </a:lvl9pPr>
-          </a:lstStyle>
-          <a:p>
-            <a:pPr lvl="0"/>
-            <a:r>
-              <a:rPr lang="en-US"/>
-              <a:t>Click to edit Master text styles</a:t>
-            </a:r>
-          </a:p>
-        </p:txBody>
-      </p:sp>
-      <p:sp>
-        <p:nvSpPr>
-          <p:cNvPr id="6" name="Content Placeholder 5">
-            <a:extLst>
-              <a:ext uri="{FF2B5EF4-FFF2-40B4-BE49-F238E27FC236}">
-                <a16:creationId xmlns:a16="http://schemas.microsoft.com/office/drawing/2014/main" id="{56CE86DF-0069-4D31-BDD3-A9A2F9B7B468}"/>
-              </a:ext>
-            </a:extLst>
-          </p:cNvPr>
-          <p:cNvSpPr>
-            <a:spLocks noGrp="1"/>
-          </p:cNvSpPr>
-          <p:nvPr>
-            <p:ph sz="quarter" idx="4"/>
-          </p:nvPr>
-        </p:nvSpPr>
-        <p:spPr>
-          <a:xfrm>
-            <a:off x="6766560" y="3018471"/>
-            <a:ext cx="4841076" cy="3104857"/>
-          </a:xfrm>
-        </p:spPr>
-        <p:txBody>
-          <a:bodyPr/>
-          <a:lstStyle/>
-          <a:p>
-            <a:pPr lvl="0"/>
-            <a:r>
-              <a:rPr lang="en-US"/>
-              <a:t>Click to edit Master text styles</a:t>
-            </a:r>
-          </a:p>
-          <a:p>
-            <a:pPr lvl="1"/>
-            <a:r>
-              <a:rPr lang="en-US"/>
-              <a:t>Second level</a:t>
-            </a:r>
-          </a:p>
-          <a:p>
-            <a:pPr lvl="2"/>
-            <a:r>
-              <a:rPr lang="en-US"/>
-              <a:t>Third level</a:t>
-            </a:r>
-          </a:p>
-          <a:p>
-            <a:pPr lvl="3"/>
-            <a:r>
-              <a:rPr lang="en-US"/>
-              <a:t>Fourth level</a:t>
-            </a:r>
-          </a:p>
-          <a:p>
-            <a:pPr lvl="4"/>
-            <a:r>
-              <a:rPr lang="en-US"/>
-              <a:t>Fifth level</a:t>
-            </a:r>
             <a:endParaRPr lang="en-US" dirty="0"/>
           </a:p>
         </p:txBody>
@@ -1827,7 +1626,7 @@
           <a:p>
             <a:fld id="{35CB7738-C0D5-4388-9F52-0B359ED750B3}" type="datetime2">
               <a:rPr lang="en-US" smtClean="0"/>
-              <a:t>Saturday, March 14, 2026</a:t>
+              <a:t>Sunday, March 15, 2026</a:t>
             </a:fld>
             <a:endParaRPr lang="en-US"/>
           </a:p>
@@ -1903,16 +1702,180 @@
             <p:ph type="title"/>
           </p:nvPr>
         </p:nvSpPr>
-        <p:spPr/>
-        <p:txBody>
-          <a:bodyPr/>
-          <a:lstStyle/>
-          <a:p>
-            <a:r>
-              <a:rPr lang="en-US"/>
+        <p:spPr>
+          <a:xfrm>
+            <a:off x="1371600" y="7377"/>
+            <a:ext cx="10241280" cy="1234440"/>
+          </a:xfrm>
+        </p:spPr>
+        <p:txBody>
+          <a:bodyPr/>
+          <a:lstStyle>
+            <a:lvl1pPr algn="ctr">
+              <a:defRPr/>
+            </a:lvl1pPr>
+          </a:lstStyle>
+          <a:p>
+            <a:r>
+              <a:rPr lang="en-US" dirty="0"/>
               <a:t>Click to edit Master title style</a:t>
             </a:r>
-            <a:endParaRPr lang="en-US" dirty="0"/>
+          </a:p>
+        </p:txBody>
+      </p:sp>
+      <p:sp>
+        <p:nvSpPr>
+          <p:cNvPr id="11" name="Text Placeholder 10">
+            <a:extLst>
+              <a:ext uri="{FF2B5EF4-FFF2-40B4-BE49-F238E27FC236}">
+                <a16:creationId xmlns:a16="http://schemas.microsoft.com/office/drawing/2014/main" id="{B81BD188-68A5-7042-E91A-782C277EAB2A}"/>
+              </a:ext>
+            </a:extLst>
+          </p:cNvPr>
+          <p:cNvSpPr>
+            <a:spLocks noGrp="1"/>
+          </p:cNvSpPr>
+          <p:nvPr>
+            <p:ph type="body" sz="quarter" idx="13"/>
+          </p:nvPr>
+        </p:nvSpPr>
+        <p:spPr>
+          <a:xfrm>
+            <a:off x="203811" y="1536210"/>
+            <a:ext cx="5892189" cy="2036767"/>
+          </a:xfrm>
+        </p:spPr>
+        <p:txBody>
+          <a:bodyPr/>
+          <a:lstStyle>
+            <a:lvl1pPr>
+              <a:defRPr sz="1400"/>
+            </a:lvl1pPr>
+            <a:lvl2pPr>
+              <a:defRPr sz="1400"/>
+            </a:lvl2pPr>
+            <a:lvl3pPr>
+              <a:defRPr sz="1400"/>
+            </a:lvl3pPr>
+            <a:lvl4pPr>
+              <a:defRPr sz="1400"/>
+            </a:lvl4pPr>
+            <a:lvl5pPr>
+              <a:defRPr sz="1400"/>
+            </a:lvl5pPr>
+          </a:lstStyle>
+          <a:p>
+            <a:pPr lvl="0"/>
+            <a:r>
+              <a:rPr lang="en-US" dirty="0"/>
+              <a:t>Click to edit Master text styles</a:t>
+            </a:r>
+          </a:p>
+          <a:p>
+            <a:pPr lvl="1"/>
+            <a:r>
+              <a:rPr lang="en-US" dirty="0"/>
+              <a:t>Second level</a:t>
+            </a:r>
+          </a:p>
+          <a:p>
+            <a:pPr lvl="2"/>
+            <a:r>
+              <a:rPr lang="en-US" dirty="0"/>
+              <a:t>Third level</a:t>
+            </a:r>
+          </a:p>
+          <a:p>
+            <a:pPr lvl="3"/>
+            <a:r>
+              <a:rPr lang="en-US" dirty="0"/>
+              <a:t>Fourth level</a:t>
+            </a:r>
+          </a:p>
+          <a:p>
+            <a:pPr lvl="4"/>
+            <a:r>
+              <a:rPr lang="en-US" dirty="0"/>
+              <a:t>Fifth level</a:t>
+            </a:r>
+          </a:p>
+        </p:txBody>
+      </p:sp>
+      <p:sp>
+        <p:nvSpPr>
+          <p:cNvPr id="12" name="Text Placeholder 10">
+            <a:extLst>
+              <a:ext uri="{FF2B5EF4-FFF2-40B4-BE49-F238E27FC236}">
+                <a16:creationId xmlns:a16="http://schemas.microsoft.com/office/drawing/2014/main" id="{19591E8D-121D-C1E5-9EE6-ADB1385B37B2}"/>
+              </a:ext>
+            </a:extLst>
+          </p:cNvPr>
+          <p:cNvSpPr>
+            <a:spLocks noGrp="1"/>
+          </p:cNvSpPr>
+          <p:nvPr>
+            <p:ph type="body" sz="quarter" idx="14"/>
+          </p:nvPr>
+        </p:nvSpPr>
+        <p:spPr>
+          <a:xfrm>
+            <a:off x="6299811" y="1536210"/>
+            <a:ext cx="5688378" cy="2036767"/>
+          </a:xfrm>
+        </p:spPr>
+        <p:txBody>
+          <a:bodyPr/>
+          <a:lstStyle>
+            <a:lvl1pPr>
+              <a:defRPr sz="1400"/>
+            </a:lvl1pPr>
+            <a:lvl2pPr>
+              <a:defRPr sz="1400"/>
+            </a:lvl2pPr>
+            <a:lvl3pPr>
+              <a:defRPr sz="1400"/>
+            </a:lvl3pPr>
+            <a:lvl4pPr>
+              <a:defRPr sz="1400"/>
+            </a:lvl4pPr>
+            <a:lvl5pPr>
+              <a:defRPr sz="1400"/>
+            </a:lvl5pPr>
+          </a:lstStyle>
+          <a:p>
+            <a:pPr lvl="0"/>
+            <a:r>
+              <a:rPr lang="en-US" dirty="0"/>
+              <a:t>Click to edit Master text styles</a:t>
+            </a:r>
+          </a:p>
+          <a:p>
+            <a:pPr lvl="1"/>
+            <a:r>
+              <a:rPr lang="en-US" dirty="0"/>
+              <a:t>Second level</a:t>
+            </a:r>
+          </a:p>
+          <a:p>
+            <a:pPr lvl="2"/>
+            <a:r>
+              <a:rPr lang="en-US" dirty="0"/>
+              <a:t>Third level</a:t>
+            </a:r>
+          </a:p>
+          <a:p>
+            <a:pPr lvl="3"/>
+            <a:r>
+              <a:rPr lang="en-US" dirty="0"/>
+              <a:t>Fourth level</a:t>
+            </a:r>
+          </a:p>
+          <a:p>
+            <a:pPr lvl="4"/>
+            <a:r>
+              <a:rPr lang="en-US" dirty="0"/>
+              <a:t>Fifth level</a:t>
+            </a:r>
           </a:p>
         </p:txBody>
       </p:sp>
@@ -1997,7 +1960,7 @@
           <a:p>
             <a:fld id="{2AE62429-2491-4ED4-A083-0B70E5B2B9FF}" type="datetime2">
               <a:rPr lang="en-US" smtClean="0"/>
-              <a:t>Saturday, March 14, 2026</a:t>
+              <a:t>Sunday, March 15, 2026</a:t>
             </a:fld>
             <a:endParaRPr lang="en-US"/>
           </a:p>
@@ -2110,7 +2073,7 @@
           <a:p>
             <a:fld id="{543B963C-D443-40F4-97CC-8FE4DEBBB582}" type="datetime2">
               <a:rPr lang="en-US" smtClean="0"/>
-              <a:t>Saturday, March 14, 2026</a:t>
+              <a:t>Sunday, March 15, 2026</a:t>
             </a:fld>
             <a:endParaRPr lang="en-US"/>
           </a:p>
@@ -2184,7 +2147,7 @@
 </file>
 
 <file path=ppt/slideLayouts/slideLayout8.xml><?xml version="1.0" encoding="utf-8"?>
-<p:sldLayout xmlns:a="http://schemas.openxmlformats.org/drawingml/2006/main" xmlns:r="http://schemas.openxmlformats.org/officeDocument/2006/relationships" xmlns:p="http://schemas.openxmlformats.org/presentationml/2006/main" type="objTx" preserve="1">
+<p:sldLayout xmlns:a="http://schemas.openxmlformats.org/drawingml/2006/main" xmlns:r="http://schemas.openxmlformats.org/officeDocument/2006/relationships" xmlns:p="http://schemas.openxmlformats.org/presentationml/2006/main" preserve="1" userDrawn="1">
   <p:cSld name="Content with Caption">
     <p:spTree>
       <p:nvGrpSpPr>
@@ -2218,7 +2181,7 @@
         </p:nvSpPr>
         <p:spPr>
           <a:xfrm>
-            <a:off x="568518" y="41221"/>
+            <a:off x="568146" y="-333356"/>
             <a:ext cx="5243885" cy="1894511"/>
           </a:xfrm>
         </p:spPr>
@@ -2334,24 +2297,323 @@
       </p:sp>
       <p:sp>
         <p:nvSpPr>
-          <p:cNvPr id="4" name="Text Placeholder 3">
-            <a:extLst>
-              <a:ext uri="{FF2B5EF4-FFF2-40B4-BE49-F238E27FC236}">
-                <a16:creationId xmlns:a16="http://schemas.microsoft.com/office/drawing/2014/main" id="{2419D2E1-4B17-4608-961E-2C4719855E89}"/>
-              </a:ext>
-            </a:extLst>
-          </p:cNvPr>
-          <p:cNvSpPr>
-            <a:spLocks noGrp="1"/>
-          </p:cNvSpPr>
-          <p:nvPr>
-            <p:ph type="body" sz="half" idx="2"/>
+          <p:cNvPr id="5" name="Date Placeholder 4">
+            <a:extLst>
+              <a:ext uri="{FF2B5EF4-FFF2-40B4-BE49-F238E27FC236}">
+                <a16:creationId xmlns:a16="http://schemas.microsoft.com/office/drawing/2014/main" id="{B75A3535-184C-438C-AE91-9C42B7C5AFB6}"/>
+              </a:ext>
+            </a:extLst>
+          </p:cNvPr>
+          <p:cNvSpPr>
+            <a:spLocks noGrp="1"/>
+          </p:cNvSpPr>
+          <p:nvPr>
+            <p:ph type="dt" sz="half" idx="10"/>
+          </p:nvPr>
+        </p:nvSpPr>
+        <p:spPr/>
+        <p:txBody>
+          <a:bodyPr/>
+          <a:lstStyle/>
+          <a:p>
+            <a:fld id="{C49F85B7-E7DB-4BA4-A3F5-C5FE55B08F95}" type="datetime2">
+              <a:rPr lang="en-US" smtClean="0"/>
+              <a:t>Sunday, March 15, 2026</a:t>
+            </a:fld>
+            <a:endParaRPr lang="en-US"/>
+          </a:p>
+        </p:txBody>
+      </p:sp>
+      <p:sp>
+        <p:nvSpPr>
+          <p:cNvPr id="6" name="Footer Placeholder 5">
+            <a:extLst>
+              <a:ext uri="{FF2B5EF4-FFF2-40B4-BE49-F238E27FC236}">
+                <a16:creationId xmlns:a16="http://schemas.microsoft.com/office/drawing/2014/main" id="{0DF6DBC3-4A58-42BA-9B55-A9A72510374C}"/>
+              </a:ext>
+            </a:extLst>
+          </p:cNvPr>
+          <p:cNvSpPr>
+            <a:spLocks noGrp="1"/>
+          </p:cNvSpPr>
+          <p:nvPr>
+            <p:ph type="ftr" sz="quarter" idx="11"/>
+          </p:nvPr>
+        </p:nvSpPr>
+        <p:spPr/>
+        <p:txBody>
+          <a:bodyPr/>
+          <a:lstStyle/>
+          <a:p>
+            <a:endParaRPr lang="en-US"/>
+          </a:p>
+        </p:txBody>
+      </p:sp>
+      <p:sp>
+        <p:nvSpPr>
+          <p:cNvPr id="7" name="Slide Number Placeholder 6">
+            <a:extLst>
+              <a:ext uri="{FF2B5EF4-FFF2-40B4-BE49-F238E27FC236}">
+                <a16:creationId xmlns:a16="http://schemas.microsoft.com/office/drawing/2014/main" id="{AD4E6563-0AB6-4038-A12B-A259552DB66C}"/>
+              </a:ext>
+            </a:extLst>
+          </p:cNvPr>
+          <p:cNvSpPr>
+            <a:spLocks noGrp="1"/>
+          </p:cNvSpPr>
+          <p:nvPr>
+            <p:ph type="sldNum" sz="quarter" idx="12"/>
+          </p:nvPr>
+        </p:nvSpPr>
+        <p:spPr/>
+        <p:txBody>
+          <a:bodyPr/>
+          <a:lstStyle/>
+          <a:p>
+            <a:fld id="{C01389E6-C847-4AD0-B56D-D205B2EAB1EE}" type="slidenum">
+              <a:rPr lang="en-US" smtClean="0"/>
+              <a:t>‹#›</a:t>
+            </a:fld>
+            <a:endParaRPr lang="en-US"/>
+          </a:p>
+        </p:txBody>
+      </p:sp>
+      <p:sp>
+        <p:nvSpPr>
+          <p:cNvPr id="9" name="Text Placeholder 8">
+            <a:extLst>
+              <a:ext uri="{FF2B5EF4-FFF2-40B4-BE49-F238E27FC236}">
+                <a16:creationId xmlns:a16="http://schemas.microsoft.com/office/drawing/2014/main" id="{4402DBDA-2555-3941-3E25-E035E1937610}"/>
+              </a:ext>
+            </a:extLst>
+          </p:cNvPr>
+          <p:cNvSpPr>
+            <a:spLocks noGrp="1"/>
+          </p:cNvSpPr>
+          <p:nvPr>
+            <p:ph type="body" sz="quarter" idx="13"/>
           </p:nvPr>
         </p:nvSpPr>
         <p:spPr>
           <a:xfrm>
-            <a:off x="568518" y="2115047"/>
-            <a:ext cx="5243885" cy="3746003"/>
+            <a:off x="568518" y="1751682"/>
+            <a:ext cx="5243513" cy="4339953"/>
+          </a:xfrm>
+        </p:spPr>
+        <p:txBody>
+          <a:bodyPr/>
+          <a:lstStyle>
+            <a:lvl1pPr>
+              <a:defRPr sz="1400"/>
+            </a:lvl1pPr>
+            <a:lvl2pPr>
+              <a:defRPr sz="1400"/>
+            </a:lvl2pPr>
+            <a:lvl3pPr>
+              <a:defRPr sz="1400"/>
+            </a:lvl3pPr>
+            <a:lvl4pPr>
+              <a:defRPr sz="1400"/>
+            </a:lvl4pPr>
+            <a:lvl5pPr>
+              <a:defRPr sz="1400"/>
+            </a:lvl5pPr>
+          </a:lstStyle>
+          <a:p>
+            <a:pPr lvl="0"/>
+            <a:r>
+              <a:rPr lang="en-US" dirty="0"/>
+              <a:t>Click to edit Master text styles</a:t>
+            </a:r>
+          </a:p>
+          <a:p>
+            <a:pPr lvl="1"/>
+            <a:r>
+              <a:rPr lang="en-US" dirty="0"/>
+              <a:t>Second level</a:t>
+            </a:r>
+          </a:p>
+          <a:p>
+            <a:pPr lvl="2"/>
+            <a:r>
+              <a:rPr lang="en-US" dirty="0"/>
+              <a:t>Third level</a:t>
+            </a:r>
+          </a:p>
+          <a:p>
+            <a:pPr lvl="3"/>
+            <a:r>
+              <a:rPr lang="en-US" dirty="0"/>
+              <a:t>Fourth level</a:t>
+            </a:r>
+          </a:p>
+          <a:p>
+            <a:pPr lvl="4"/>
+            <a:r>
+              <a:rPr lang="en-US" dirty="0"/>
+              <a:t>Fifth level</a:t>
+            </a:r>
+          </a:p>
+        </p:txBody>
+      </p:sp>
+    </p:spTree>
+    <p:extLst>
+      <p:ext uri="{BB962C8B-B14F-4D97-AF65-F5344CB8AC3E}">
+        <p14:creationId xmlns:p14="http://schemas.microsoft.com/office/powerpoint/2010/main" val="2543851996"/>
+      </p:ext>
+    </p:extLst>
+  </p:cSld>
+  <p:clrMapOvr>
+    <a:masterClrMapping/>
+  </p:clrMapOvr>
+</p:sldLayout>
+</file>
+
+<file path=ppt/slideLayouts/slideLayout9.xml><?xml version="1.0" encoding="utf-8"?>
+<p:sldLayout xmlns:a="http://schemas.openxmlformats.org/drawingml/2006/main" xmlns:r="http://schemas.openxmlformats.org/officeDocument/2006/relationships" xmlns:p="http://schemas.openxmlformats.org/presentationml/2006/main" type="picTx" preserve="1">
+  <p:cSld name="Picture with Caption">
+    <p:spTree>
+      <p:nvGrpSpPr>
+        <p:cNvPr id="1" name=""/>
+        <p:cNvGrpSpPr/>
+        <p:nvPr/>
+      </p:nvGrpSpPr>
+      <p:grpSpPr>
+        <a:xfrm>
+          <a:off x="0" y="0"/>
+          <a:ext cx="0" cy="0"/>
+          <a:chOff x="0" y="0"/>
+          <a:chExt cx="0" cy="0"/>
+        </a:xfrm>
+      </p:grpSpPr>
+      <p:sp>
+        <p:nvSpPr>
+          <p:cNvPr id="2" name="Title 1">
+            <a:extLst>
+              <a:ext uri="{FF2B5EF4-FFF2-40B4-BE49-F238E27FC236}">
+                <a16:creationId xmlns:a16="http://schemas.microsoft.com/office/drawing/2014/main" id="{BE9702C5-1E3B-4C62-A538-59BB572864A0}"/>
+              </a:ext>
+            </a:extLst>
+          </p:cNvPr>
+          <p:cNvSpPr>
+            <a:spLocks noGrp="1"/>
+          </p:cNvSpPr>
+          <p:nvPr>
+            <p:ph type="title"/>
+          </p:nvPr>
+        </p:nvSpPr>
+        <p:spPr>
+          <a:xfrm>
+            <a:off x="1371600" y="987552"/>
+            <a:ext cx="3932237" cy="1892808"/>
+          </a:xfrm>
+        </p:spPr>
+        <p:txBody>
+          <a:bodyPr anchor="b"/>
+          <a:lstStyle>
+            <a:lvl1pPr>
+              <a:defRPr sz="3200" baseline="0"/>
+            </a:lvl1pPr>
+          </a:lstStyle>
+          <a:p>
+            <a:r>
+              <a:rPr lang="en-US"/>
+              <a:t>Click to edit Master title style</a:t>
+            </a:r>
+            <a:endParaRPr lang="en-US" dirty="0"/>
+          </a:p>
+        </p:txBody>
+      </p:sp>
+      <p:sp>
+        <p:nvSpPr>
+          <p:cNvPr id="3" name="Picture Placeholder 2">
+            <a:extLst>
+              <a:ext uri="{FF2B5EF4-FFF2-40B4-BE49-F238E27FC236}">
+                <a16:creationId xmlns:a16="http://schemas.microsoft.com/office/drawing/2014/main" id="{6E2CF574-95CE-4E60-B2CF-3B5B4F33A767}"/>
+              </a:ext>
+            </a:extLst>
+          </p:cNvPr>
+          <p:cNvSpPr>
+            <a:spLocks noGrp="1"/>
+          </p:cNvSpPr>
+          <p:nvPr>
+            <p:ph type="pic" idx="1"/>
+          </p:nvPr>
+        </p:nvSpPr>
+        <p:spPr>
+          <a:xfrm>
+            <a:off x="5505319" y="987425"/>
+            <a:ext cx="5833242" cy="4873625"/>
+          </a:xfrm>
+        </p:spPr>
+        <p:txBody>
+          <a:bodyPr/>
+          <a:lstStyle>
+            <a:lvl1pPr marL="0" indent="0">
+              <a:buNone/>
+              <a:defRPr sz="3200"/>
+            </a:lvl1pPr>
+            <a:lvl2pPr marL="457200" indent="0">
+              <a:buNone/>
+              <a:defRPr sz="2800"/>
+            </a:lvl2pPr>
+            <a:lvl3pPr marL="914400" indent="0">
+              <a:buNone/>
+              <a:defRPr sz="2400"/>
+            </a:lvl3pPr>
+            <a:lvl4pPr marL="1371600" indent="0">
+              <a:buNone/>
+              <a:defRPr sz="2000"/>
+            </a:lvl4pPr>
+            <a:lvl5pPr marL="1828800" indent="0">
+              <a:buNone/>
+              <a:defRPr sz="2000"/>
+            </a:lvl5pPr>
+            <a:lvl6pPr marL="2286000" indent="0">
+              <a:buNone/>
+              <a:defRPr sz="2000"/>
+            </a:lvl6pPr>
+            <a:lvl7pPr marL="2743200" indent="0">
+              <a:buNone/>
+              <a:defRPr sz="2000"/>
+            </a:lvl7pPr>
+            <a:lvl8pPr marL="3200400" indent="0">
+              <a:buNone/>
+              <a:defRPr sz="2000"/>
+            </a:lvl8pPr>
+            <a:lvl9pPr marL="3657600" indent="0">
+              <a:buNone/>
+              <a:defRPr sz="2000"/>
+            </a:lvl9pPr>
+          </a:lstStyle>
+          <a:p>
+            <a:r>
+              <a:rPr lang="en-US"/>
+              <a:t>Click icon to add picture</a:t>
+            </a:r>
+          </a:p>
+        </p:txBody>
+      </p:sp>
+      <p:sp>
+        <p:nvSpPr>
+          <p:cNvPr id="4" name="Text Placeholder 3">
+            <a:extLst>
+              <a:ext uri="{FF2B5EF4-FFF2-40B4-BE49-F238E27FC236}">
+                <a16:creationId xmlns:a16="http://schemas.microsoft.com/office/drawing/2014/main" id="{6D039F7C-C735-4356-8B04-89E19047950C}"/>
+              </a:ext>
+            </a:extLst>
+          </p:cNvPr>
+          <p:cNvSpPr>
+            <a:spLocks noGrp="1"/>
+          </p:cNvSpPr>
+          <p:nvPr>
+            <p:ph type="body" sz="half" idx="2"/>
+          </p:nvPr>
+        </p:nvSpPr>
+        <p:spPr>
+          <a:xfrm>
+            <a:off x="1371600" y="3033286"/>
+            <a:ext cx="3932237" cy="2835702"/>
           </a:xfrm>
         </p:spPr>
         <p:txBody>
@@ -2397,298 +2659,6 @@
           <a:p>
             <a:pPr lvl="0"/>
             <a:r>
-              <a:rPr lang="en-US" dirty="0"/>
-              <a:t>Click to edit Master text styles</a:t>
-            </a:r>
-          </a:p>
-        </p:txBody>
-      </p:sp>
-      <p:sp>
-        <p:nvSpPr>
-          <p:cNvPr id="5" name="Date Placeholder 4">
-            <a:extLst>
-              <a:ext uri="{FF2B5EF4-FFF2-40B4-BE49-F238E27FC236}">
-                <a16:creationId xmlns:a16="http://schemas.microsoft.com/office/drawing/2014/main" id="{B75A3535-184C-438C-AE91-9C42B7C5AFB6}"/>
-              </a:ext>
-            </a:extLst>
-          </p:cNvPr>
-          <p:cNvSpPr>
-            <a:spLocks noGrp="1"/>
-          </p:cNvSpPr>
-          <p:nvPr>
-            <p:ph type="dt" sz="half" idx="10"/>
-          </p:nvPr>
-        </p:nvSpPr>
-        <p:spPr/>
-        <p:txBody>
-          <a:bodyPr/>
-          <a:lstStyle/>
-          <a:p>
-            <a:fld id="{C49F85B7-E7DB-4BA4-A3F5-C5FE55B08F95}" type="datetime2">
-              <a:rPr lang="en-US" smtClean="0"/>
-              <a:t>Saturday, March 14, 2026</a:t>
-            </a:fld>
-            <a:endParaRPr lang="en-US"/>
-          </a:p>
-        </p:txBody>
-      </p:sp>
-      <p:sp>
-        <p:nvSpPr>
-          <p:cNvPr id="6" name="Footer Placeholder 5">
-            <a:extLst>
-              <a:ext uri="{FF2B5EF4-FFF2-40B4-BE49-F238E27FC236}">
-                <a16:creationId xmlns:a16="http://schemas.microsoft.com/office/drawing/2014/main" id="{0DF6DBC3-4A58-42BA-9B55-A9A72510374C}"/>
-              </a:ext>
-            </a:extLst>
-          </p:cNvPr>
-          <p:cNvSpPr>
-            <a:spLocks noGrp="1"/>
-          </p:cNvSpPr>
-          <p:nvPr>
-            <p:ph type="ftr" sz="quarter" idx="11"/>
-          </p:nvPr>
-        </p:nvSpPr>
-        <p:spPr/>
-        <p:txBody>
-          <a:bodyPr/>
-          <a:lstStyle/>
-          <a:p>
-            <a:endParaRPr lang="en-US"/>
-          </a:p>
-        </p:txBody>
-      </p:sp>
-      <p:sp>
-        <p:nvSpPr>
-          <p:cNvPr id="7" name="Slide Number Placeholder 6">
-            <a:extLst>
-              <a:ext uri="{FF2B5EF4-FFF2-40B4-BE49-F238E27FC236}">
-                <a16:creationId xmlns:a16="http://schemas.microsoft.com/office/drawing/2014/main" id="{AD4E6563-0AB6-4038-A12B-A259552DB66C}"/>
-              </a:ext>
-            </a:extLst>
-          </p:cNvPr>
-          <p:cNvSpPr>
-            <a:spLocks noGrp="1"/>
-          </p:cNvSpPr>
-          <p:nvPr>
-            <p:ph type="sldNum" sz="quarter" idx="12"/>
-          </p:nvPr>
-        </p:nvSpPr>
-        <p:spPr/>
-        <p:txBody>
-          <a:bodyPr/>
-          <a:lstStyle/>
-          <a:p>
-            <a:fld id="{C01389E6-C847-4AD0-B56D-D205B2EAB1EE}" type="slidenum">
-              <a:rPr lang="en-US" smtClean="0"/>
-              <a:t>‹#›</a:t>
-            </a:fld>
-            <a:endParaRPr lang="en-US"/>
-          </a:p>
-        </p:txBody>
-      </p:sp>
-    </p:spTree>
-    <p:extLst>
-      <p:ext uri="{BB962C8B-B14F-4D97-AF65-F5344CB8AC3E}">
-        <p14:creationId xmlns:p14="http://schemas.microsoft.com/office/powerpoint/2010/main" val="2543851996"/>
-      </p:ext>
-    </p:extLst>
-  </p:cSld>
-  <p:clrMapOvr>
-    <a:masterClrMapping/>
-  </p:clrMapOvr>
-</p:sldLayout>
-</file>
-
-<file path=ppt/slideLayouts/slideLayout9.xml><?xml version="1.0" encoding="utf-8"?>
-<p:sldLayout xmlns:a="http://schemas.openxmlformats.org/drawingml/2006/main" xmlns:r="http://schemas.openxmlformats.org/officeDocument/2006/relationships" xmlns:p="http://schemas.openxmlformats.org/presentationml/2006/main" type="picTx" preserve="1">
-  <p:cSld name="Picture with Caption">
-    <p:spTree>
-      <p:nvGrpSpPr>
-        <p:cNvPr id="1" name=""/>
-        <p:cNvGrpSpPr/>
-        <p:nvPr/>
-      </p:nvGrpSpPr>
-      <p:grpSpPr>
-        <a:xfrm>
-          <a:off x="0" y="0"/>
-          <a:ext cx="0" cy="0"/>
-          <a:chOff x="0" y="0"/>
-          <a:chExt cx="0" cy="0"/>
-        </a:xfrm>
-      </p:grpSpPr>
-      <p:sp>
-        <p:nvSpPr>
-          <p:cNvPr id="2" name="Title 1">
-            <a:extLst>
-              <a:ext uri="{FF2B5EF4-FFF2-40B4-BE49-F238E27FC236}">
-                <a16:creationId xmlns:a16="http://schemas.microsoft.com/office/drawing/2014/main" id="{BE9702C5-1E3B-4C62-A538-59BB572864A0}"/>
-              </a:ext>
-            </a:extLst>
-          </p:cNvPr>
-          <p:cNvSpPr>
-            <a:spLocks noGrp="1"/>
-          </p:cNvSpPr>
-          <p:nvPr>
-            <p:ph type="title"/>
-          </p:nvPr>
-        </p:nvSpPr>
-        <p:spPr>
-          <a:xfrm>
-            <a:off x="1371600" y="987552"/>
-            <a:ext cx="3932237" cy="1892808"/>
-          </a:xfrm>
-        </p:spPr>
-        <p:txBody>
-          <a:bodyPr anchor="b"/>
-          <a:lstStyle>
-            <a:lvl1pPr>
-              <a:defRPr sz="3200" baseline="0"/>
-            </a:lvl1pPr>
-          </a:lstStyle>
-          <a:p>
-            <a:r>
-              <a:rPr lang="en-US"/>
-              <a:t>Click to edit Master title style</a:t>
-            </a:r>
-            <a:endParaRPr lang="en-US" dirty="0"/>
-          </a:p>
-        </p:txBody>
-      </p:sp>
-      <p:sp>
-        <p:nvSpPr>
-          <p:cNvPr id="3" name="Picture Placeholder 2">
-            <a:extLst>
-              <a:ext uri="{FF2B5EF4-FFF2-40B4-BE49-F238E27FC236}">
-                <a16:creationId xmlns:a16="http://schemas.microsoft.com/office/drawing/2014/main" id="{6E2CF574-95CE-4E60-B2CF-3B5B4F33A767}"/>
-              </a:ext>
-            </a:extLst>
-          </p:cNvPr>
-          <p:cNvSpPr>
-            <a:spLocks noGrp="1"/>
-          </p:cNvSpPr>
-          <p:nvPr>
-            <p:ph type="pic" idx="1"/>
-          </p:nvPr>
-        </p:nvSpPr>
-        <p:spPr>
-          <a:xfrm>
-            <a:off x="5505319" y="987425"/>
-            <a:ext cx="5833242" cy="4873625"/>
-          </a:xfrm>
-        </p:spPr>
-        <p:txBody>
-          <a:bodyPr/>
-          <a:lstStyle>
-            <a:lvl1pPr marL="0" indent="0">
-              <a:buNone/>
-              <a:defRPr sz="3200"/>
-            </a:lvl1pPr>
-            <a:lvl2pPr marL="457200" indent="0">
-              <a:buNone/>
-              <a:defRPr sz="2800"/>
-            </a:lvl2pPr>
-            <a:lvl3pPr marL="914400" indent="0">
-              <a:buNone/>
-              <a:defRPr sz="2400"/>
-            </a:lvl3pPr>
-            <a:lvl4pPr marL="1371600" indent="0">
-              <a:buNone/>
-              <a:defRPr sz="2000"/>
-            </a:lvl4pPr>
-            <a:lvl5pPr marL="1828800" indent="0">
-              <a:buNone/>
-              <a:defRPr sz="2000"/>
-            </a:lvl5pPr>
-            <a:lvl6pPr marL="2286000" indent="0">
-              <a:buNone/>
-              <a:defRPr sz="2000"/>
-            </a:lvl6pPr>
-            <a:lvl7pPr marL="2743200" indent="0">
-              <a:buNone/>
-              <a:defRPr sz="2000"/>
-            </a:lvl7pPr>
-            <a:lvl8pPr marL="3200400" indent="0">
-              <a:buNone/>
-              <a:defRPr sz="2000"/>
-            </a:lvl8pPr>
-            <a:lvl9pPr marL="3657600" indent="0">
-              <a:buNone/>
-              <a:defRPr sz="2000"/>
-            </a:lvl9pPr>
-          </a:lstStyle>
-          <a:p>
-            <a:r>
-              <a:rPr lang="en-US"/>
-              <a:t>Click icon to add picture</a:t>
-            </a:r>
-          </a:p>
-        </p:txBody>
-      </p:sp>
-      <p:sp>
-        <p:nvSpPr>
-          <p:cNvPr id="4" name="Text Placeholder 3">
-            <a:extLst>
-              <a:ext uri="{FF2B5EF4-FFF2-40B4-BE49-F238E27FC236}">
-                <a16:creationId xmlns:a16="http://schemas.microsoft.com/office/drawing/2014/main" id="{6D039F7C-C735-4356-8B04-89E19047950C}"/>
-              </a:ext>
-            </a:extLst>
-          </p:cNvPr>
-          <p:cNvSpPr>
-            <a:spLocks noGrp="1"/>
-          </p:cNvSpPr>
-          <p:nvPr>
-            <p:ph type="body" sz="half" idx="2"/>
-          </p:nvPr>
-        </p:nvSpPr>
-        <p:spPr>
-          <a:xfrm>
-            <a:off x="1371600" y="3033286"/>
-            <a:ext cx="3932237" cy="2835702"/>
-          </a:xfrm>
-        </p:spPr>
-        <p:txBody>
-          <a:bodyPr/>
-          <a:lstStyle>
-            <a:lvl1pPr marL="0" indent="0">
-              <a:buNone/>
-              <a:defRPr sz="1600"/>
-            </a:lvl1pPr>
-            <a:lvl2pPr marL="457200" indent="0">
-              <a:buNone/>
-              <a:defRPr sz="1400"/>
-            </a:lvl2pPr>
-            <a:lvl3pPr marL="914400" indent="0">
-              <a:buNone/>
-              <a:defRPr sz="1200"/>
-            </a:lvl3pPr>
-            <a:lvl4pPr marL="1371600" indent="0">
-              <a:buNone/>
-              <a:defRPr sz="1000"/>
-            </a:lvl4pPr>
-            <a:lvl5pPr marL="1828800" indent="0">
-              <a:buNone/>
-              <a:defRPr sz="1000"/>
-            </a:lvl5pPr>
-            <a:lvl6pPr marL="2286000" indent="0">
-              <a:buNone/>
-              <a:defRPr sz="1000"/>
-            </a:lvl6pPr>
-            <a:lvl7pPr marL="2743200" indent="0">
-              <a:buNone/>
-              <a:defRPr sz="1000"/>
-            </a:lvl7pPr>
-            <a:lvl8pPr marL="3200400" indent="0">
-              <a:buNone/>
-              <a:defRPr sz="1000"/>
-            </a:lvl8pPr>
-            <a:lvl9pPr marL="3657600" indent="0">
-              <a:buNone/>
-              <a:defRPr sz="1000"/>
-            </a:lvl9pPr>
-          </a:lstStyle>
-          <a:p>
-            <a:pPr lvl="0"/>
-            <a:r>
               <a:rPr lang="en-US"/>
               <a:t>Click to edit Master text styles</a:t>
             </a:r>
@@ -2718,7 +2688,7 @@
           <a:p>
             <a:fld id="{38E9A0C2-0448-4687-AEE4-71847FB40C42}" type="datetime2">
               <a:rPr lang="en-US" smtClean="0"/>
-              <a:t>Saturday, March 14, 2026</a:t>
+              <a:t>Sunday, March 15, 2026</a:t>
             </a:fld>
             <a:endParaRPr lang="en-US"/>
           </a:p>
@@ -3087,7 +3057,7 @@
           <a:p>
             <a:fld id="{A6D14B8F-CE2D-424D-AF0A-C48024A68703}" type="datetime2">
               <a:rPr lang="en-US" smtClean="0"/>
-              <a:t>Saturday, March 14, 2026</a:t>
+              <a:t>Sunday, March 15, 2026</a:t>
             </a:fld>
             <a:endParaRPr cap="all" dirty="0" lang="en-US"/>
           </a:p>
@@ -3573,8 +3543,6 @@
               <a:rPr/>
               <a:t>March 9 - March 14</a:t>
             </a:r>
-            <a:br/>
-            <a:br/>
           </a:p>
         </p:txBody>
       </p:sp>
@@ -3604,7 +3572,7 @@
             </a:pPr>
             <a:r>
               <a:rPr/>
-              <a:t>2026-03-14</a:t>
+              <a:t>2026-03-16</a:t>
             </a:r>
           </a:p>
         </p:txBody>
@@ -3749,17 +3717,41 @@
               <a:rPr>
                 <a:hlinkClick r:id="rId5" action="ppaction://hlinksldjump"/>
               </a:rPr>
-              <a:t>Data</a:t>
-            </a:r>
-          </a:p>
-          <a:p>
-            <a:pPr lvl="1"/>
+              <a:t>Boxplots of weight at age</a:t>
+            </a:r>
           </a:p>
           <a:p>
             <a:pPr lvl="0"/>
             <a:r>
               <a:rPr>
                 <a:hlinkClick r:id="rId6" action="ppaction://hlinksldjump"/>
+              </a:rPr>
+              <a:t>General lake trout per lake</a:t>
+            </a:r>
+          </a:p>
+          <a:p>
+            <a:pPr lvl="1"/>
+            <a:r>
+              <a:rPr>
+                <a:hlinkClick r:id="rId7" action="ppaction://hlinksldjump"/>
+              </a:rPr>
+              <a:t>Lake Clark</a:t>
+            </a:r>
+          </a:p>
+          <a:p>
+            <a:pPr lvl="0"/>
+            <a:r>
+              <a:rPr>
+                <a:hlinkClick r:id="rId8" action="ppaction://hlinksldjump"/>
+              </a:rPr>
+              <a:t>FB4 Output</a:t>
+            </a:r>
+          </a:p>
+          <a:p>
+            <a:pPr lvl="0"/>
+            <a:r>
+              <a:rPr>
+                <a:hlinkClick r:id="rId9" action="ppaction://hlinksldjump"/>
               </a:rPr>
               <a:t>References</a:t>
             </a:r>
@@ -3976,10 +3968,10 @@
       </p:grpSpPr>
       <p:sp>
         <p:nvSpPr>
-          <p:cNvPr id="2" name="Title 1">
-            <a:extLst>
-              <a:ext uri="{FF2B5EF4-FFF2-40B4-BE49-F238E27FC236}">
-                <a16:creationId xmlns:a16="http://schemas.microsoft.com/office/drawing/2014/main" id="{CAFE0F35-0AE7-48AB-9005-F1DB4BD0B473}"/>
+          <p:cNvPr id="10" name="Title 9">
+            <a:extLst>
+              <a:ext uri="{FF2B5EF4-FFF2-40B4-BE49-F238E27FC236}">
+                <a16:creationId xmlns:a16="http://schemas.microsoft.com/office/drawing/2014/main" id="{2D453288-3D76-40C1-BE00-223AB28F13DF}"/>
               </a:ext>
             </a:extLst>
           </p:cNvPr>
@@ -3992,7 +3984,7 @@
         </p:nvSpPr>
         <p:spPr>
           <a:xfrm>
-            <a:off x="1371600" y="376696"/>
+            <a:off x="1371600" y="7377"/>
             <a:ext cx="10241280" cy="1234440"/>
           </a:xfrm>
         </p:spPr>
@@ -4012,18 +4004,18 @@
       </p:sp>
       <p:sp>
         <p:nvSpPr>
-          <p:cNvPr id="3" name="Content Placeholder 2">
-            <a:extLst>
-              <a:ext uri="{FF2B5EF4-FFF2-40B4-BE49-F238E27FC236}">
-                <a16:creationId xmlns:a16="http://schemas.microsoft.com/office/drawing/2014/main" id="{4DDD4022-C31F-4C4C-B5BF-5F9730C08A00}"/>
-              </a:ext>
-            </a:extLst>
-          </p:cNvPr>
-          <p:cNvSpPr>
-            <a:spLocks noGrp="1"/>
-          </p:cNvSpPr>
-          <p:nvPr>
-            <p:ph idx="1"/>
+          <p:cNvPr id="11" name="Text Placeholder 10">
+            <a:extLst>
+              <a:ext uri="{FF2B5EF4-FFF2-40B4-BE49-F238E27FC236}">
+                <a16:creationId xmlns:a16="http://schemas.microsoft.com/office/drawing/2014/main" id="{B81BD188-68A5-7042-E91A-782C277EAB2A}"/>
+              </a:ext>
+            </a:extLst>
+          </p:cNvPr>
+          <p:cNvSpPr>
+            <a:spLocks noGrp="1"/>
+          </p:cNvSpPr>
+          <p:nvPr>
+            <p:ph idx="13" sz="quarter" type="body"/>
           </p:nvPr>
         </p:nvSpPr>
         <p:spPr/>
@@ -4056,7 +4048,7 @@
             <a:pPr lvl="0"/>
             <a:r>
               <a:rPr/>
-              <a:t>We pick an age that has robust data (10, 20, 30).</a:t>
+              <a:t>We combine all available lake trout data and pick an age that has robust data (e.g. 10, 20, 30).</a:t>
             </a:r>
           </a:p>
           <a:p>
@@ -4083,21 +4075,279 @@
               <a:t>Therefore, we expect that age 10 lake trout will have a higher growth and consumption rate than age 30 lake trout.</a:t>
             </a:r>
           </a:p>
+        </p:txBody>
+      </p:sp>
+      <p:sp>
+        <p:nvSpPr>
+          <p:cNvPr id="12" name="Text Placeholder 10">
+            <a:extLst>
+              <a:ext uri="{FF2B5EF4-FFF2-40B4-BE49-F238E27FC236}">
+                <a16:creationId xmlns:a16="http://schemas.microsoft.com/office/drawing/2014/main" id="{19591E8D-121D-C1E5-9EE6-ADB1385B37B2}"/>
+              </a:ext>
+            </a:extLst>
+          </p:cNvPr>
+          <p:cNvSpPr>
+            <a:spLocks noGrp="1"/>
+          </p:cNvSpPr>
+          <p:nvPr>
+            <p:ph idx="14" sz="quarter" type="body"/>
+          </p:nvPr>
+        </p:nvSpPr>
+        <p:spPr/>
+        <p:txBody>
+          <a:bodyPr/>
+          <a:lstStyle/>
           <a:p>
             <a:pPr lvl="0"/>
             <a:r>
               <a:rPr/>
-              <a:t>Create design profile (one per age) using median and quartile weights. Run names for this design profile are shown in Table 1.</a:t>
-            </a:r>
-          </a:p>
-        </p:txBody>
-      </p:sp>
+              <a:t>The design profiles (one per age) are made using median and quartile weights for each age.</a:t>
+            </a:r>
+          </a:p>
+          <a:p>
+            <a:pPr lvl="1"/>
+            <a:r>
+              <a:rPr/>
+              <a:t>Run names for these design profiles are shown in the table.</a:t>
+            </a:r>
+          </a:p>
+          <a:p>
+            <a:pPr lvl="0"/>
+            <a:r>
+              <a:rPr/>
+              <a:t>These weight ranges represent our “generic lake trout” to use for all lakes.</a:t>
+            </a:r>
+          </a:p>
+        </p:txBody>
+      </p:sp>
+      <p:graphicFrame>
+        <p:nvGraphicFramePr>
+          <p:cNvPr id="6" name="Content Placeholder 5"/>
+          <p:cNvGraphicFramePr>
+            <a:graphicFrameLocks noGrp="1"/>
+          </p:cNvGraphicFramePr>
+          <p:nvPr>
+            <p:ph idx="1"/>
+          </p:nvPr>
+        </p:nvGraphicFramePr>
+        <p:xfrm>
+          <a:off x="6807200" y="3746500"/>
+          <a:ext cx="4838700" cy="2527300"/>
+        </p:xfrm>
+        <a:graphic>
+          <a:graphicData uri="http://schemas.openxmlformats.org/drawingml/2006/table">
+            <a:tbl>
+              <a:tblPr firstRow="1" bandRow="1">
+                <a:tableStyleId>{5C22544A-7EE6-4342-B048-85BDC9FD1C3A}</a:tableStyleId>
+              </a:tblPr>
+              <a:tblGrid>
+                <a:gridCol w="2413000"/>
+                <a:gridCol w="2413000"/>
+              </a:tblGrid>
+              <a:tr h="0">
+                <a:tc>
+                  <a:txBody>
+                    <a:bodyPr/>
+                    <a:lstStyle/>
+                    <a:p>
+                      <a:pPr lvl="0" indent="0" marL="0" algn="l">
+                        <a:buNone/>
+                      </a:pPr>
+                      <a:r>
+                        <a:rPr/>
+                        <a:t>Run name</a:t>
+                      </a:r>
+                    </a:p>
+                  </a:txBody>
+                  <a:tcPr/>
+                </a:tc>
+                <a:tc>
+                  <a:txBody>
+                    <a:bodyPr/>
+                    <a:lstStyle/>
+                    <a:p>
+                      <a:pPr lvl="0" indent="0" marL="0" algn="l">
+                        <a:buNone/>
+                      </a:pPr>
+                      <a:r>
+                        <a:rPr/>
+                        <a:t>Interpretation</a:t>
+                      </a:r>
+                    </a:p>
+                  </a:txBody>
+                  <a:tcPr/>
+                </a:tc>
+              </a:tr>
+              <a:tr h="0">
+                <a:tc>
+                  <a:txBody>
+                    <a:bodyPr/>
+                    <a:lstStyle/>
+                    <a:p>
+                      <a:pPr lvl="0" indent="0" marL="0" algn="l">
+                        <a:buNone/>
+                      </a:pPr>
+                      <a:r>
+                        <a:rPr/>
+                        <a:t>age_xx_med_med</a:t>
+                      </a:r>
+                    </a:p>
+                  </a:txBody>
+                </a:tc>
+                <a:tc>
+                  <a:txBody>
+                    <a:bodyPr/>
+                    <a:lstStyle/>
+                    <a:p>
+                      <a:pPr lvl="0" indent="0" marL="0" algn="l">
+                        <a:buNone/>
+                      </a:pPr>
+                      <a:r>
+                        <a:rPr/>
+                        <a:t>typical growth</a:t>
+                      </a:r>
+                    </a:p>
+                  </a:txBody>
+                </a:tc>
+              </a:tr>
+              <a:tr h="0">
+                <a:tc>
+                  <a:txBody>
+                    <a:bodyPr/>
+                    <a:lstStyle/>
+                    <a:p>
+                      <a:pPr lvl="0" indent="0" marL="0" algn="l">
+                        <a:buNone/>
+                      </a:pPr>
+                      <a:r>
+                        <a:rPr/>
+                        <a:t>age_xx_q1_q1</a:t>
+                      </a:r>
+                    </a:p>
+                  </a:txBody>
+                </a:tc>
+                <a:tc>
+                  <a:txBody>
+                    <a:bodyPr/>
+                    <a:lstStyle/>
+                    <a:p>
+                      <a:pPr lvl="0" indent="0" marL="0" algn="l">
+                        <a:buNone/>
+                      </a:pPr>
+                      <a:r>
+                        <a:rPr/>
+                        <a:t>steady growth at the low end of their mass</a:t>
+                      </a:r>
+                    </a:p>
+                  </a:txBody>
+                </a:tc>
+              </a:tr>
+              <a:tr h="0">
+                <a:tc>
+                  <a:txBody>
+                    <a:bodyPr/>
+                    <a:lstStyle/>
+                    <a:p>
+                      <a:pPr lvl="0" indent="0" marL="0" algn="l">
+                        <a:buNone/>
+                      </a:pPr>
+                      <a:r>
+                        <a:rPr/>
+                        <a:t>age_xx_q3_q3</a:t>
+                      </a:r>
+                    </a:p>
+                  </a:txBody>
+                </a:tc>
+                <a:tc>
+                  <a:txBody>
+                    <a:bodyPr/>
+                    <a:lstStyle/>
+                    <a:p>
+                      <a:pPr lvl="0" indent="0" marL="0" algn="l">
+                        <a:buNone/>
+                      </a:pPr>
+                      <a:r>
+                        <a:rPr/>
+                        <a:t>steady growth at the upper end of their mass</a:t>
+                      </a:r>
+                    </a:p>
+                  </a:txBody>
+                </a:tc>
+              </a:tr>
+              <a:tr h="0">
+                <a:tc>
+                  <a:txBody>
+                    <a:bodyPr/>
+                    <a:lstStyle/>
+                    <a:p>
+                      <a:pPr lvl="0" indent="0" marL="0" algn="l">
+                        <a:buNone/>
+                      </a:pPr>
+                      <a:r>
+                        <a:rPr/>
+                        <a:t>age_xx_q1_q3</a:t>
+                      </a:r>
+                    </a:p>
+                  </a:txBody>
+                </a:tc>
+                <a:tc>
+                  <a:txBody>
+                    <a:bodyPr/>
+                    <a:lstStyle/>
+                    <a:p>
+                      <a:pPr lvl="0" indent="0" marL="0" algn="l">
+                        <a:buNone/>
+                      </a:pPr>
+                      <a:r>
+                        <a:rPr/>
+                        <a:t>rapid growth</a:t>
+                      </a:r>
+                    </a:p>
+                  </a:txBody>
+                </a:tc>
+              </a:tr>
+              <a:tr h="0">
+                <a:tc>
+                  <a:txBody>
+                    <a:bodyPr/>
+                    <a:lstStyle/>
+                    <a:p>
+                      <a:pPr lvl="0" indent="0" marL="0" algn="l">
+                        <a:buNone/>
+                      </a:pPr>
+                      <a:r>
+                        <a:rPr/>
+                        <a:t>age_xx_q3_q1</a:t>
+                      </a:r>
+                    </a:p>
+                  </a:txBody>
+                </a:tc>
+                <a:tc>
+                  <a:txBody>
+                    <a:bodyPr/>
+                    <a:lstStyle/>
+                    <a:p>
+                      <a:pPr lvl="0" indent="0" marL="0" algn="l">
+                        <a:buNone/>
+                      </a:pPr>
+                      <a:r>
+                        <a:rPr/>
+                        <a:t>mass loss</a:t>
+                      </a:r>
+                    </a:p>
+                  </a:txBody>
+                </a:tc>
+              </a:tr>
+            </a:tbl>
+          </a:graphicData>
+        </a:graphic>
+      </p:graphicFrame>
       <p:sp>
         <p:nvSpPr>
           <p:cNvPr id="9" name="Slide Number Placeholder 8">
             <a:extLst>
               <a:ext uri="{FF2B5EF4-FFF2-40B4-BE49-F238E27FC236}">
-                <a16:creationId xmlns:a16="http://schemas.microsoft.com/office/drawing/2014/main" id="{615C2CCF-26D5-D13A-5F52-C045B09E9913}"/>
+                <a16:creationId xmlns:a16="http://schemas.microsoft.com/office/drawing/2014/main" id="{6784B1D1-BE0C-48F4-BC74-90675A0F07CF}"/>
               </a:ext>
             </a:extLst>
           </p:cNvPr>
@@ -4115,10 +4365,9 @@
           <a:p>
             <a:fld id="{C01389E6-C847-4AD0-B56D-D205B2EAB1EE}" type="slidenum">
               <a:rPr lang="en-US" smtClean="0"/>
-              <a:pPr/>
               <a:t>‹#›</a:t>
             </a:fld>
-            <a:endParaRPr dirty="0" lang="en-US" sz="800"/>
+            <a:endParaRPr lang="en-US"/>
           </a:p>
         </p:txBody>
       </p:sp>
@@ -4149,6 +4398,332 @@
           <p:cNvPr id="2" name="Title 1">
             <a:extLst>
               <a:ext uri="{FF2B5EF4-FFF2-40B4-BE49-F238E27FC236}">
+                <a16:creationId xmlns:a16="http://schemas.microsoft.com/office/drawing/2014/main" id="{A428DFBD-F5ED-455C-8AD0-97476A55E3D5}"/>
+              </a:ext>
+            </a:extLst>
+          </p:cNvPr>
+          <p:cNvSpPr>
+            <a:spLocks noGrp="1"/>
+          </p:cNvSpPr>
+          <p:nvPr>
+            <p:ph type="title"/>
+          </p:nvPr>
+        </p:nvSpPr>
+        <p:spPr>
+          <a:xfrm>
+            <a:off x="1371600" y="46380"/>
+            <a:ext cx="10241280" cy="1234440"/>
+          </a:xfrm>
+        </p:spPr>
+        <p:txBody>
+          <a:bodyPr/>
+          <a:lstStyle/>
+          <a:p>
+            <a:pPr lvl="0" indent="0" marL="0">
+              <a:buNone/>
+            </a:pPr>
+            <a:r>
+              <a:rPr/>
+              <a:t>Boxplots of weight at age</a:t>
+            </a:r>
+          </a:p>
+        </p:txBody>
+      </p:sp>
+      <p:pic>
+        <p:nvPicPr>
+          <p:cNvPr descr="plots/unnamed-chunk-2-1.png" id="0" name="Picture 1"/>
+          <p:cNvPicPr>
+            <a:picLocks noGrp="1" noChangeAspect="1"/>
+          </p:cNvPicPr>
+          <p:nvPr/>
+        </p:nvPicPr>
+        <p:blipFill>
+          <a:blip r:embed="rId2"/>
+          <a:stretch>
+            <a:fillRect/>
+          </a:stretch>
+        </p:blipFill>
+        <p:spPr bwMode="auto">
+          <a:xfrm>
+            <a:off x="825500" y="1816100"/>
+            <a:ext cx="5727700" cy="3822700"/>
+          </a:xfrm>
+          <a:prstGeom prst="rect">
+            <a:avLst/>
+          </a:prstGeom>
+          <a:noFill/>
+          <a:ln w="9525">
+            <a:noFill/>
+            <a:headEnd/>
+            <a:tailEnd/>
+          </a:ln>
+        </p:spPr>
+      </p:pic>
+      <p:pic>
+        <p:nvPicPr>
+          <p:cNvPr descr="pics/summary_stats.png" id="0" name="Picture 1"/>
+          <p:cNvPicPr>
+            <a:picLocks noGrp="1" noChangeAspect="1"/>
+          </p:cNvPicPr>
+          <p:nvPr/>
+        </p:nvPicPr>
+        <p:blipFill>
+          <a:blip r:embed="rId3"/>
+          <a:stretch>
+            <a:fillRect/>
+          </a:stretch>
+        </p:blipFill>
+        <p:spPr bwMode="auto">
+          <a:xfrm>
+            <a:off x="7213600" y="1384300"/>
+            <a:ext cx="4267200" cy="4902200"/>
+          </a:xfrm>
+          <a:prstGeom prst="rect">
+            <a:avLst/>
+          </a:prstGeom>
+          <a:noFill/>
+          <a:ln w="9525">
+            <a:noFill/>
+            <a:headEnd/>
+            <a:tailEnd/>
+          </a:ln>
+        </p:spPr>
+      </p:pic>
+      <p:sp>
+        <p:nvSpPr>
+          <p:cNvPr id="7" name="Slide Number Placeholder 6">
+            <a:extLst>
+              <a:ext uri="{FF2B5EF4-FFF2-40B4-BE49-F238E27FC236}">
+                <a16:creationId xmlns:a16="http://schemas.microsoft.com/office/drawing/2014/main" id="{499D8C08-BF20-4D5E-9004-0C075C36D8A4}"/>
+              </a:ext>
+            </a:extLst>
+          </p:cNvPr>
+          <p:cNvSpPr>
+            <a:spLocks noGrp="1"/>
+          </p:cNvSpPr>
+          <p:nvPr>
+            <p:ph idx="12" sz="quarter" type="sldNum"/>
+          </p:nvPr>
+        </p:nvSpPr>
+        <p:spPr/>
+        <p:txBody>
+          <a:bodyPr/>
+          <a:lstStyle/>
+          <a:p>
+            <a:fld id="{C01389E6-C847-4AD0-B56D-D205B2EAB1EE}" type="slidenum">
+              <a:rPr lang="en-US" smtClean="0"/>
+              <a:t>‹#›</a:t>
+            </a:fld>
+            <a:endParaRPr lang="en-US"/>
+          </a:p>
+        </p:txBody>
+      </p:sp>
+    </p:spTree>
+  </p:cSld>
+</p:sld>
+</file>
+
+<file path=ppt/slides/slide6.xml><?xml version="1.0" encoding="utf-8"?>
+<p:sld xmlns:a="http://schemas.openxmlformats.org/drawingml/2006/main" xmlns:r="http://schemas.openxmlformats.org/officeDocument/2006/relationships" xmlns:p="http://schemas.openxmlformats.org/presentationml/2006/main">
+  <p:cSld>
+    <p:spTree>
+      <p:nvGrpSpPr>
+        <p:cNvPr id="1" name=""/>
+        <p:cNvGrpSpPr/>
+        <p:nvPr/>
+      </p:nvGrpSpPr>
+      <p:grpSpPr>
+        <a:xfrm>
+          <a:off x="0" y="0"/>
+          <a:ext cx="0" cy="0"/>
+          <a:chOff x="0" y="0"/>
+          <a:chExt cx="0" cy="0"/>
+        </a:xfrm>
+      </p:grpSpPr>
+      <p:sp>
+        <p:nvSpPr>
+          <p:cNvPr id="2" name="Title 1">
+            <a:extLst>
+              <a:ext uri="{FF2B5EF4-FFF2-40B4-BE49-F238E27FC236}">
+                <a16:creationId xmlns:a16="http://schemas.microsoft.com/office/drawing/2014/main" id="{EB4EB55F-536E-4547-A5D2-0483FC3684CD}"/>
+              </a:ext>
+            </a:extLst>
+          </p:cNvPr>
+          <p:cNvSpPr>
+            <a:spLocks noGrp="1"/>
+          </p:cNvSpPr>
+          <p:nvPr>
+            <p:ph type="title"/>
+          </p:nvPr>
+        </p:nvSpPr>
+        <p:spPr>
+          <a:xfrm>
+            <a:off x="568146" y="-333356"/>
+            <a:ext cx="5243885" cy="1894511"/>
+          </a:xfrm>
+        </p:spPr>
+        <p:txBody>
+          <a:bodyPr/>
+          <a:lstStyle/>
+          <a:p>
+            <a:pPr lvl="0" indent="0" marL="0">
+              <a:buNone/>
+            </a:pPr>
+            <a:r>
+              <a:rPr/>
+              <a:t>General lake trout per lake</a:t>
+            </a:r>
+          </a:p>
+        </p:txBody>
+      </p:sp>
+      <p:sp>
+        <p:nvSpPr>
+          <p:cNvPr id="9" name="Text Placeholder 8">
+            <a:extLst>
+              <a:ext uri="{FF2B5EF4-FFF2-40B4-BE49-F238E27FC236}">
+                <a16:creationId xmlns:a16="http://schemas.microsoft.com/office/drawing/2014/main" id="{4402DBDA-2555-3941-3E25-E035E1937610}"/>
+              </a:ext>
+            </a:extLst>
+          </p:cNvPr>
+          <p:cNvSpPr>
+            <a:spLocks noGrp="1"/>
+          </p:cNvSpPr>
+          <p:nvPr>
+            <p:ph idx="13" sz="quarter" type="body"/>
+          </p:nvPr>
+        </p:nvSpPr>
+        <p:spPr/>
+        <p:txBody>
+          <a:bodyPr/>
+          <a:lstStyle/>
+          <a:p>
+            <a:pPr lvl="0" indent="0" marL="0">
+              <a:spcBef>
+                <a:spcPts val="3000"/>
+              </a:spcBef>
+              <a:buNone/>
+            </a:pPr>
+            <a:r>
+              <a:rPr b="1"/>
+              <a:t>Lake Clark</a:t>
+            </a:r>
+          </a:p>
+          <a:p>
+            <a:pPr lvl="0"/>
+            <a:r>
+              <a:rPr/>
+              <a:t>The first design profile was made using surface water temperatures from Lake Clark. A new temperature profile was made for Lake CLark to include all surface temperatures from all years.</a:t>
+            </a:r>
+          </a:p>
+          <a:p>
+            <a:pPr lvl="0"/>
+            <a:r>
+              <a:rPr/>
+              <a:t>The mean temperature for each day of year was taken and used for the temperature file. 9C becomes available on May 22nd and ends on Dec. 21st.</a:t>
+            </a:r>
+          </a:p>
+          <a:p>
+            <a:pPr lvl="1"/>
+            <a:r>
+              <a:rPr/>
+              <a:t>May 22 -Dec 21 the temperature was set to 9C.</a:t>
+            </a:r>
+          </a:p>
+          <a:p>
+            <a:pPr lvl="1"/>
+            <a:r>
+              <a:rPr/>
+              <a:t>All other days = mean surface temperatures from full dataset.</a:t>
+            </a:r>
+          </a:p>
+        </p:txBody>
+      </p:sp>
+      <p:pic>
+        <p:nvPicPr>
+          <p:cNvPr descr="plots/unnamed-chunk-4-1.png" id="0" name="Picture 1"/>
+          <p:cNvPicPr>
+            <a:picLocks noGrp="1" noChangeAspect="1"/>
+          </p:cNvPicPr>
+          <p:nvPr/>
+        </p:nvPicPr>
+        <p:blipFill>
+          <a:blip r:embed="rId2"/>
+          <a:stretch>
+            <a:fillRect/>
+          </a:stretch>
+        </p:blipFill>
+        <p:spPr bwMode="auto">
+          <a:xfrm>
+            <a:off x="6045200" y="1155700"/>
+            <a:ext cx="6045200" cy="4025900"/>
+          </a:xfrm>
+          <a:prstGeom prst="rect">
+            <a:avLst/>
+          </a:prstGeom>
+          <a:noFill/>
+          <a:ln w="9525">
+            <a:noFill/>
+            <a:headEnd/>
+            <a:tailEnd/>
+          </a:ln>
+        </p:spPr>
+      </p:pic>
+      <p:sp>
+        <p:nvSpPr>
+          <p:cNvPr id="7" name="Slide Number Placeholder 6">
+            <a:extLst>
+              <a:ext uri="{FF2B5EF4-FFF2-40B4-BE49-F238E27FC236}">
+                <a16:creationId xmlns:a16="http://schemas.microsoft.com/office/drawing/2014/main" id="{AD4E6563-0AB6-4038-A12B-A259552DB66C}"/>
+              </a:ext>
+            </a:extLst>
+          </p:cNvPr>
+          <p:cNvSpPr>
+            <a:spLocks noGrp="1"/>
+          </p:cNvSpPr>
+          <p:nvPr>
+            <p:ph idx="12" sz="quarter" type="sldNum"/>
+          </p:nvPr>
+        </p:nvSpPr>
+        <p:spPr/>
+        <p:txBody>
+          <a:bodyPr/>
+          <a:lstStyle/>
+          <a:p>
+            <a:fld id="{C01389E6-C847-4AD0-B56D-D205B2EAB1EE}" type="slidenum">
+              <a:rPr lang="en-US" smtClean="0"/>
+              <a:t>‹#›</a:t>
+            </a:fld>
+            <a:endParaRPr lang="en-US"/>
+          </a:p>
+        </p:txBody>
+      </p:sp>
+    </p:spTree>
+  </p:cSld>
+</p:sld>
+</file>
+
+<file path=ppt/slides/slide7.xml><?xml version="1.0" encoding="utf-8"?>
+<p:sld xmlns:a="http://schemas.openxmlformats.org/drawingml/2006/main" xmlns:r="http://schemas.openxmlformats.org/officeDocument/2006/relationships" xmlns:p="http://schemas.openxmlformats.org/presentationml/2006/main">
+  <p:cSld>
+    <p:spTree>
+      <p:nvGrpSpPr>
+        <p:cNvPr id="1" name=""/>
+        <p:cNvGrpSpPr/>
+        <p:nvPr/>
+      </p:nvGrpSpPr>
+      <p:grpSpPr>
+        <a:xfrm>
+          <a:off x="0" y="0"/>
+          <a:ext cx="0" cy="0"/>
+          <a:chOff x="0" y="0"/>
+          <a:chExt cx="0" cy="0"/>
+        </a:xfrm>
+      </p:grpSpPr>
+      <p:sp>
+        <p:nvSpPr>
+          <p:cNvPr id="2" name="Title 1">
+            <a:extLst>
+              <a:ext uri="{FF2B5EF4-FFF2-40B4-BE49-F238E27FC236}">
                 <a16:creationId xmlns:a16="http://schemas.microsoft.com/office/drawing/2014/main" id="{CAFE0F35-0AE7-48AB-9005-F1DB4BD0B473}"/>
               </a:ext>
             </a:extLst>
@@ -4175,8 +4750,124 @@
             </a:pPr>
             <a:r>
               <a:rPr/>
-              <a:t>Data</a:t>
-            </a:r>
+              <a:t>FB4 Output</a:t>
+            </a:r>
+          </a:p>
+        </p:txBody>
+      </p:sp>
+      <p:sp>
+        <p:nvSpPr>
+          <p:cNvPr id="3" name="Content Placeholder 2">
+            <a:extLst>
+              <a:ext uri="{FF2B5EF4-FFF2-40B4-BE49-F238E27FC236}">
+                <a16:creationId xmlns:a16="http://schemas.microsoft.com/office/drawing/2014/main" id="{4DDD4022-C31F-4C4C-B5BF-5F9730C08A00}"/>
+              </a:ext>
+            </a:extLst>
+          </p:cNvPr>
+          <p:cNvSpPr>
+            <a:spLocks noGrp="1"/>
+          </p:cNvSpPr>
+          <p:nvPr>
+            <p:ph idx="1"/>
+          </p:nvPr>
+        </p:nvSpPr>
+        <p:spPr/>
+        <p:txBody>
+          <a:bodyPr/>
+          <a:lstStyle/>
+          <a:p>
+            <a:pPr lvl="0"/>
+            <a:r>
+              <a:rPr/>
+              <a:t>These two plots do not support my initial assumption that younger lake trout have a higher growth rates. Age 6 has the lowest growth rate, while age 23 has the highest growth rate.</a:t>
+            </a:r>
+          </a:p>
+          <a:p>
+            <a:pPr lvl="0"/>
+            <a:r>
+              <a:rPr/>
+              <a:t>The interpretations for each run name is consistent with their p-values. For example:</a:t>
+            </a:r>
+          </a:p>
+          <a:p>
+            <a:pPr lvl="1"/>
+            <a:r>
+              <a:rPr/>
+              <a:t>age_14_med_med (typical growth) p-value = 0.33083</a:t>
+            </a:r>
+          </a:p>
+          <a:p>
+            <a:pPr lvl="1"/>
+            <a:r>
+              <a:rPr/>
+              <a:t>age_14_q1_q1 (steady growth at the low end of their mass) p-value = 0.381905</a:t>
+            </a:r>
+          </a:p>
+          <a:p>
+            <a:pPr lvl="1"/>
+            <a:r>
+              <a:rPr/>
+              <a:t>age_14_q3_q3 (steady growth at the upper end of their mass) p-value = 0.351765</a:t>
+            </a:r>
+          </a:p>
+          <a:p>
+            <a:pPr lvl="1"/>
+            <a:r>
+              <a:rPr/>
+              <a:t>age_14_q1_q3 (rapid growth) = 0.668207</a:t>
+            </a:r>
+          </a:p>
+          <a:p>
+            <a:pPr lvl="1"/>
+            <a:r>
+              <a:rPr/>
+              <a:t>age_14_q3_q1 (mass loss) = 0.086254</a:t>
+            </a:r>
+          </a:p>
+          <a:p>
+            <a:pPr lvl="0" indent="0" marL="0">
+              <a:buNone/>
+            </a:pPr>
+          </a:p>
+          <a:p>
+            <a:pPr lvl="0"/>
+            <a:r>
+              <a:rPr/>
+              <a:t>Next steps:</a:t>
+            </a:r>
+          </a:p>
+          <a:p>
+            <a:pPr lvl="0"/>
+            <a:r>
+              <a:rPr/>
+              <a:t>Creating temp profiles for Kijik Lake and Chelle Lake using same methods as above.</a:t>
+            </a:r>
+          </a:p>
+          <a:p>
+            <a:pPr lvl="0"/>
+            <a:r>
+              <a:rPr/>
+              <a:t>Calculating growing degree days (GDD) for each lake and using GDD as a predictor variable to compare FB4 outputs (each output represents a lake)</a:t>
+            </a:r>
+          </a:p>
+          <a:p>
+            <a:pPr lvl="0"/>
+            <a:r>
+              <a:rPr/>
+              <a:t>Looking through new temp data that Krista sent and plotting a thermocline for Lake Clark, Kijik, and Chelle first.</a:t>
+            </a:r>
+          </a:p>
+          <a:p>
+            <a:pPr lvl="0"/>
+            <a:r>
+              <a:rPr/>
+              <a:t>Keep looking around in literature for more diet data. I’ve been using the same diet schedule and I want to play around with the diets more.</a:t>
+            </a:r>
+          </a:p>
+          <a:p>
+            <a:pPr lvl="0" indent="0" marL="0">
+              <a:buNone/>
+            </a:pPr>
           </a:p>
         </p:txBody>
       </p:sp>
@@ -4215,7 +4906,7 @@
 </p:sld>
 </file>
 
-<file path=ppt/slides/slide6.xml><?xml version="1.0" encoding="utf-8"?>
+<file path=ppt/slides/slide8.xml><?xml version="1.0" encoding="utf-8"?>
 <p:sld xmlns:a="http://schemas.openxmlformats.org/drawingml/2006/main" xmlns:r="http://schemas.openxmlformats.org/officeDocument/2006/relationships" xmlns:p="http://schemas.openxmlformats.org/presentationml/2006/main">
   <p:cSld>
     <p:spTree>

--- a/Age-weight.pptx
+++ b/Age-weight.pptx
@@ -4721,10 +4721,10 @@
       </p:grpSpPr>
       <p:sp>
         <p:nvSpPr>
-          <p:cNvPr id="2" name="Title 1">
-            <a:extLst>
-              <a:ext uri="{FF2B5EF4-FFF2-40B4-BE49-F238E27FC236}">
-                <a16:creationId xmlns:a16="http://schemas.microsoft.com/office/drawing/2014/main" id="{CAFE0F35-0AE7-48AB-9005-F1DB4BD0B473}"/>
+          <p:cNvPr id="10" name="Title 9">
+            <a:extLst>
+              <a:ext uri="{FF2B5EF4-FFF2-40B4-BE49-F238E27FC236}">
+                <a16:creationId xmlns:a16="http://schemas.microsoft.com/office/drawing/2014/main" id="{2D453288-3D76-40C1-BE00-223AB28F13DF}"/>
               </a:ext>
             </a:extLst>
           </p:cNvPr>
@@ -4737,7 +4737,7 @@
         </p:nvSpPr>
         <p:spPr>
           <a:xfrm>
-            <a:off x="1371600" y="376696"/>
+            <a:off x="1371600" y="7377"/>
             <a:ext cx="10241280" cy="1234440"/>
           </a:xfrm>
         </p:spPr>
@@ -4757,78 +4757,134 @@
       </p:sp>
       <p:sp>
         <p:nvSpPr>
-          <p:cNvPr id="3" name="Content Placeholder 2">
-            <a:extLst>
-              <a:ext uri="{FF2B5EF4-FFF2-40B4-BE49-F238E27FC236}">
-                <a16:creationId xmlns:a16="http://schemas.microsoft.com/office/drawing/2014/main" id="{4DDD4022-C31F-4C4C-B5BF-5F9730C08A00}"/>
-              </a:ext>
-            </a:extLst>
-          </p:cNvPr>
-          <p:cNvSpPr>
-            <a:spLocks noGrp="1"/>
-          </p:cNvSpPr>
-          <p:nvPr>
-            <p:ph idx="1"/>
+          <p:cNvPr id="11" name="Text Placeholder 10">
+            <a:extLst>
+              <a:ext uri="{FF2B5EF4-FFF2-40B4-BE49-F238E27FC236}">
+                <a16:creationId xmlns:a16="http://schemas.microsoft.com/office/drawing/2014/main" id="{B81BD188-68A5-7042-E91A-782C277EAB2A}"/>
+              </a:ext>
+            </a:extLst>
+          </p:cNvPr>
+          <p:cNvSpPr>
+            <a:spLocks noGrp="1"/>
+          </p:cNvSpPr>
+          <p:nvPr>
+            <p:ph idx="13" sz="quarter" type="body"/>
           </p:nvPr>
         </p:nvSpPr>
         <p:spPr/>
         <p:txBody>
           <a:bodyPr/>
           <a:lstStyle/>
-          <a:p>
-            <a:pPr lvl="0"/>
-            <a:r>
-              <a:rPr/>
-              <a:t>These two plots do not support my initial assumption that younger lake trout have a higher growth rates. Age 6 has the lowest growth rate, while age 23 has the highest growth rate.</a:t>
-            </a:r>
-          </a:p>
-          <a:p>
-            <a:pPr lvl="0"/>
-            <a:r>
-              <a:rPr/>
-              <a:t>The interpretations for each run name is consistent with their p-values. For example:</a:t>
-            </a:r>
-          </a:p>
-          <a:p>
-            <a:pPr lvl="1"/>
-            <a:r>
-              <a:rPr/>
-              <a:t>age_14_med_med (typical growth) p-value = 0.33083</a:t>
-            </a:r>
-          </a:p>
-          <a:p>
-            <a:pPr lvl="1"/>
-            <a:r>
-              <a:rPr/>
-              <a:t>age_14_q1_q1 (steady growth at the low end of their mass) p-value = 0.381905</a:t>
-            </a:r>
-          </a:p>
-          <a:p>
-            <a:pPr lvl="1"/>
-            <a:r>
-              <a:rPr/>
-              <a:t>age_14_q3_q3 (steady growth at the upper end of their mass) p-value = 0.351765</a:t>
-            </a:r>
-          </a:p>
-          <a:p>
-            <a:pPr lvl="1"/>
-            <a:r>
-              <a:rPr/>
-              <a:t>age_14_q1_q3 (rapid growth) = 0.668207</a:t>
-            </a:r>
-          </a:p>
-          <a:p>
-            <a:pPr lvl="1"/>
-            <a:r>
-              <a:rPr/>
-              <a:t>age_14_q3_q1 (mass loss) = 0.086254</a:t>
-            </a:r>
-          </a:p>
           <a:p>
             <a:pPr lvl="0" indent="0" marL="0">
               <a:buNone/>
             </a:pPr>
-          </a:p>
+            <a:r>
+              <a:rPr/>
+              <a:t>Key takeaways:</a:t>
+            </a:r>
+          </a:p>
+          <a:p>
+            <a:pPr lvl="0"/>
+            <a:r>
+              <a:rPr/>
+              <a:t>These two plots do not support my initial assumption that younger lake trout have a higher growth rates. Age 6 has the lowest growth rate, while age 23 has the highest growth rate.</a:t>
+            </a:r>
+          </a:p>
+          <a:p>
+            <a:pPr lvl="0"/>
+            <a:r>
+              <a:rPr/>
+              <a:t>The interpretations for each run name is consistent with their p-values. For example:</a:t>
+            </a:r>
+          </a:p>
+          <a:p>
+            <a:pPr lvl="1"/>
+            <a:r>
+              <a:rPr/>
+              <a:t>age_14_med_med (typical growth) p-value = 0.33083</a:t>
+            </a:r>
+          </a:p>
+          <a:p>
+            <a:pPr lvl="1"/>
+            <a:r>
+              <a:rPr/>
+              <a:t>age_14_q1_q1 (steady growth at the low end of their mass) p-value = 0.381905</a:t>
+            </a:r>
+          </a:p>
+          <a:p>
+            <a:pPr lvl="1"/>
+            <a:r>
+              <a:rPr/>
+              <a:t>age_14_q3_q3 (steady growth at the upper end of their mass) p-value = 0.351765</a:t>
+            </a:r>
+          </a:p>
+          <a:p>
+            <a:pPr lvl="1"/>
+            <a:r>
+              <a:rPr/>
+              <a:t>age_14_q1_q3 (rapid growth) = 0.668207</a:t>
+            </a:r>
+          </a:p>
+          <a:p>
+            <a:pPr lvl="1"/>
+            <a:r>
+              <a:rPr/>
+              <a:t>age_14_q3_q1 (mass loss) = 0.086254</a:t>
+            </a:r>
+          </a:p>
+        </p:txBody>
+      </p:sp>
+      <p:pic>
+        <p:nvPicPr>
+          <p:cNvPr descr="plots/unnamed-chunk-6-1.png" id="0" name="Picture 1"/>
+          <p:cNvPicPr>
+            <a:picLocks noGrp="1" noChangeAspect="1"/>
+          </p:cNvPicPr>
+          <p:nvPr/>
+        </p:nvPicPr>
+        <p:blipFill>
+          <a:blip r:embed="rId2"/>
+          <a:stretch>
+            <a:fillRect/>
+          </a:stretch>
+        </p:blipFill>
+        <p:spPr bwMode="auto">
+          <a:xfrm>
+            <a:off x="1219200" y="3746500"/>
+            <a:ext cx="3784600" cy="2527300"/>
+          </a:xfrm>
+          <a:prstGeom prst="rect">
+            <a:avLst/>
+          </a:prstGeom>
+          <a:noFill/>
+          <a:ln w="9525">
+            <a:noFill/>
+            <a:headEnd/>
+            <a:tailEnd/>
+          </a:ln>
+        </p:spPr>
+      </p:pic>
+      <p:sp>
+        <p:nvSpPr>
+          <p:cNvPr id="12" name="Text Placeholder 10">
+            <a:extLst>
+              <a:ext uri="{FF2B5EF4-FFF2-40B4-BE49-F238E27FC236}">
+                <a16:creationId xmlns:a16="http://schemas.microsoft.com/office/drawing/2014/main" id="{19591E8D-121D-C1E5-9EE6-ADB1385B37B2}"/>
+              </a:ext>
+            </a:extLst>
+          </p:cNvPr>
+          <p:cNvSpPr>
+            <a:spLocks noGrp="1"/>
+          </p:cNvSpPr>
+          <p:nvPr>
+            <p:ph idx="14" sz="quarter" type="body"/>
+          </p:nvPr>
+        </p:nvSpPr>
+        <p:spPr/>
+        <p:txBody>
+          <a:bodyPr/>
+          <a:lstStyle/>
           <a:p>
             <a:pPr lvl="0"/>
             <a:r>
@@ -4837,46 +4893,71 @@
             </a:r>
           </a:p>
           <a:p>
-            <a:pPr lvl="0"/>
+            <a:pPr lvl="1"/>
             <a:r>
               <a:rPr/>
               <a:t>Creating temp profiles for Kijik Lake and Chelle Lake using same methods as above.</a:t>
             </a:r>
           </a:p>
           <a:p>
-            <a:pPr lvl="0"/>
+            <a:pPr lvl="1"/>
             <a:r>
               <a:rPr/>
               <a:t>Calculating growing degree days (GDD) for each lake and using GDD as a predictor variable to compare FB4 outputs (each output represents a lake)</a:t>
             </a:r>
           </a:p>
           <a:p>
-            <a:pPr lvl="0"/>
+            <a:pPr lvl="1"/>
             <a:r>
               <a:rPr/>
               <a:t>Looking through new temp data that Krista sent and plotting a thermocline for Lake Clark, Kijik, and Chelle first.</a:t>
             </a:r>
           </a:p>
           <a:p>
-            <a:pPr lvl="0"/>
+            <a:pPr lvl="1"/>
             <a:r>
               <a:rPr/>
               <a:t>Keep looking around in literature for more diet data. I’ve been using the same diet schedule and I want to play around with the diets more.</a:t>
             </a:r>
           </a:p>
-          <a:p>
-            <a:pPr lvl="0" indent="0" marL="0">
-              <a:buNone/>
-            </a:pPr>
-          </a:p>
-        </p:txBody>
-      </p:sp>
+        </p:txBody>
+      </p:sp>
+      <p:pic>
+        <p:nvPicPr>
+          <p:cNvPr descr="plots/unnamed-chunk-7-1.png" id="0" name="Picture 1"/>
+          <p:cNvPicPr>
+            <a:picLocks noGrp="1" noChangeAspect="1"/>
+          </p:cNvPicPr>
+          <p:nvPr/>
+        </p:nvPicPr>
+        <p:blipFill>
+          <a:blip r:embed="rId3"/>
+          <a:stretch>
+            <a:fillRect/>
+          </a:stretch>
+        </p:blipFill>
+        <p:spPr bwMode="auto">
+          <a:xfrm>
+            <a:off x="7327900" y="3746500"/>
+            <a:ext cx="3784600" cy="2527300"/>
+          </a:xfrm>
+          <a:prstGeom prst="rect">
+            <a:avLst/>
+          </a:prstGeom>
+          <a:noFill/>
+          <a:ln w="9525">
+            <a:noFill/>
+            <a:headEnd/>
+            <a:tailEnd/>
+          </a:ln>
+        </p:spPr>
+      </p:pic>
       <p:sp>
         <p:nvSpPr>
           <p:cNvPr id="9" name="Slide Number Placeholder 8">
             <a:extLst>
               <a:ext uri="{FF2B5EF4-FFF2-40B4-BE49-F238E27FC236}">
-                <a16:creationId xmlns:a16="http://schemas.microsoft.com/office/drawing/2014/main" id="{615C2CCF-26D5-D13A-5F52-C045B09E9913}"/>
+                <a16:creationId xmlns:a16="http://schemas.microsoft.com/office/drawing/2014/main" id="{6784B1D1-BE0C-48F4-BC74-90675A0F07CF}"/>
               </a:ext>
             </a:extLst>
           </p:cNvPr>
@@ -4894,10 +4975,9 @@
           <a:p>
             <a:fld id="{C01389E6-C847-4AD0-B56D-D205B2EAB1EE}" type="slidenum">
               <a:rPr lang="en-US" smtClean="0"/>
-              <a:pPr/>
               <a:t>‹#›</a:t>
             </a:fld>
-            <a:endParaRPr dirty="0" lang="en-US" sz="800"/>
+            <a:endParaRPr lang="en-US"/>
           </a:p>
         </p:txBody>
       </p:sp>
